--- a/2/S2/PRESENTATION/INFO2_Hamrouni_Yassine_PresEtufSciTech.pptx
+++ b/2/S2/PRESENTATION/INFO2_Hamrouni_Yassine_PresEtufSciTech.pptx
@@ -5,21 +5,22 @@
     <p:sldMasterId id="2147483660" r:id="rId1"/>
   </p:sldMasterIdLst>
   <p:notesMasterIdLst>
-    <p:notesMasterId r:id="rId11"/>
+    <p:notesMasterId r:id="rId12"/>
   </p:notesMasterIdLst>
   <p:handoutMasterIdLst>
-    <p:handoutMasterId r:id="rId12"/>
+    <p:handoutMasterId r:id="rId13"/>
   </p:handoutMasterIdLst>
   <p:sldIdLst>
     <p:sldId id="261" r:id="rId2"/>
-    <p:sldId id="265" r:id="rId3"/>
-    <p:sldId id="274" r:id="rId4"/>
-    <p:sldId id="266" r:id="rId5"/>
-    <p:sldId id="267" r:id="rId6"/>
-    <p:sldId id="268" r:id="rId7"/>
-    <p:sldId id="269" r:id="rId8"/>
-    <p:sldId id="275" r:id="rId9"/>
-    <p:sldId id="270" r:id="rId10"/>
+    <p:sldId id="276" r:id="rId3"/>
+    <p:sldId id="265" r:id="rId4"/>
+    <p:sldId id="274" r:id="rId5"/>
+    <p:sldId id="266" r:id="rId6"/>
+    <p:sldId id="267" r:id="rId7"/>
+    <p:sldId id="268" r:id="rId8"/>
+    <p:sldId id="269" r:id="rId9"/>
+    <p:sldId id="275" r:id="rId10"/>
+    <p:sldId id="270" r:id="rId11"/>
   </p:sldIdLst>
   <p:sldSz cx="12192000" cy="6858000"/>
   <p:notesSz cx="6858000" cy="9144000"/>
@@ -223,7 +224,7 @@
           <a:p>
             <a:fld id="{3F55A8C8-005D-492D-8B79-008F48BB471C}" type="datetimeFigureOut">
               <a:rPr lang="fr-FR" smtClean="0"/>
-              <a:t>17/03/2025</a:t>
+              <a:t>26/03/2025</a:t>
             </a:fld>
             <a:endParaRPr lang="fr-FR"/>
           </a:p>
@@ -400,7 +401,7 @@
           <a:p>
             <a:fld id="{65C28F05-4ED4-4022-A426-C7B97DD684FF}" type="datetimeFigureOut">
               <a:rPr lang="en-US" smtClean="0"/>
-              <a:t>3/17/2025</a:t>
+              <a:t>3/26/2025</a:t>
             </a:fld>
             <a:endParaRPr lang="en-US"/>
           </a:p>
@@ -1795,6 +1796,355 @@
 </p:sld>
 </file>
 
+<file path=ppt/slides/slide10.xml><?xml version="1.0" encoding="utf-8"?>
+<p:sld xmlns:a="http://schemas.openxmlformats.org/drawingml/2006/main" xmlns:r="http://schemas.openxmlformats.org/officeDocument/2006/relationships" xmlns:p="http://schemas.openxmlformats.org/presentationml/2006/main">
+  <p:cSld>
+    <p:spTree>
+      <p:nvGrpSpPr>
+        <p:cNvPr id="1" name=""/>
+        <p:cNvGrpSpPr/>
+        <p:nvPr/>
+      </p:nvGrpSpPr>
+      <p:grpSpPr>
+        <a:xfrm>
+          <a:off x="0" y="0"/>
+          <a:ext cx="0" cy="0"/>
+          <a:chOff x="0" y="0"/>
+          <a:chExt cx="0" cy="0"/>
+        </a:xfrm>
+      </p:grpSpPr>
+      <p:sp>
+        <p:nvSpPr>
+          <p:cNvPr id="2" name="TextBox 1">
+            <a:extLst>
+              <a:ext uri="{FF2B5EF4-FFF2-40B4-BE49-F238E27FC236}">
+                <a16:creationId xmlns:a16="http://schemas.microsoft.com/office/drawing/2014/main" id="{E00B64CD-753B-4BF5-B4C1-B055AA0A54FB}"/>
+              </a:ext>
+            </a:extLst>
+          </p:cNvPr>
+          <p:cNvSpPr txBox="1"/>
+          <p:nvPr/>
+        </p:nvSpPr>
+        <p:spPr>
+          <a:xfrm>
+            <a:off x="3953456" y="75611"/>
+            <a:ext cx="7178466" cy="923330"/>
+          </a:xfrm>
+          <a:prstGeom prst="rect">
+            <a:avLst/>
+          </a:prstGeom>
+          <a:noFill/>
+        </p:spPr>
+        <p:txBody>
+          <a:bodyPr wrap="square">
+            <a:spAutoFit/>
+          </a:bodyPr>
+          <a:lstStyle/>
+          <a:p>
+            <a:r>
+              <a:rPr lang="fr-FR" sz="5400" dirty="0">
+                <a:solidFill>
+                  <a:srgbClr val="6E80A5"/>
+                </a:solidFill>
+              </a:rPr>
+              <a:t>Conclusion</a:t>
+            </a:r>
+            <a:endParaRPr lang="en-US" sz="5400" dirty="0">
+              <a:solidFill>
+                <a:srgbClr val="6E80A5"/>
+              </a:solidFill>
+            </a:endParaRPr>
+          </a:p>
+        </p:txBody>
+      </p:sp>
+      <p:pic>
+        <p:nvPicPr>
+          <p:cNvPr id="4" name="Picture 3">
+            <a:extLst>
+              <a:ext uri="{FF2B5EF4-FFF2-40B4-BE49-F238E27FC236}">
+                <a16:creationId xmlns:a16="http://schemas.microsoft.com/office/drawing/2014/main" id="{DF8A8325-E6A8-441C-83D4-6224D79235B4}"/>
+              </a:ext>
+            </a:extLst>
+          </p:cNvPr>
+          <p:cNvPicPr>
+            <a:picLocks noChangeAspect="1"/>
+          </p:cNvPicPr>
+          <p:nvPr/>
+        </p:nvPicPr>
+        <p:blipFill>
+          <a:blip r:embed="rId2"/>
+          <a:stretch>
+            <a:fillRect/>
+          </a:stretch>
+        </p:blipFill>
+        <p:spPr>
+          <a:xfrm>
+            <a:off x="7417172" y="6280617"/>
+            <a:ext cx="3714750" cy="428625"/>
+          </a:xfrm>
+          <a:prstGeom prst="rect">
+            <a:avLst/>
+          </a:prstGeom>
+        </p:spPr>
+      </p:pic>
+      <p:pic>
+        <p:nvPicPr>
+          <p:cNvPr id="6" name="Picture 5">
+            <a:extLst>
+              <a:ext uri="{FF2B5EF4-FFF2-40B4-BE49-F238E27FC236}">
+                <a16:creationId xmlns:a16="http://schemas.microsoft.com/office/drawing/2014/main" id="{30A0B9AE-FA2C-47BD-B65A-C29F578D35FC}"/>
+              </a:ext>
+            </a:extLst>
+          </p:cNvPr>
+          <p:cNvPicPr>
+            <a:picLocks noChangeAspect="1"/>
+          </p:cNvPicPr>
+          <p:nvPr/>
+        </p:nvPicPr>
+        <p:blipFill>
+          <a:blip r:embed="rId3"/>
+          <a:stretch>
+            <a:fillRect/>
+          </a:stretch>
+        </p:blipFill>
+        <p:spPr>
+          <a:xfrm>
+            <a:off x="8000439" y="6166317"/>
+            <a:ext cx="3219450" cy="542925"/>
+          </a:xfrm>
+          <a:prstGeom prst="rect">
+            <a:avLst/>
+          </a:prstGeom>
+        </p:spPr>
+      </p:pic>
+      <p:pic>
+        <p:nvPicPr>
+          <p:cNvPr id="10" name="Picture 9">
+            <a:extLst>
+              <a:ext uri="{FF2B5EF4-FFF2-40B4-BE49-F238E27FC236}">
+                <a16:creationId xmlns:a16="http://schemas.microsoft.com/office/drawing/2014/main" id="{43A5C624-EB3E-4190-9805-EEC5E50479C2}"/>
+              </a:ext>
+            </a:extLst>
+          </p:cNvPr>
+          <p:cNvPicPr>
+            <a:picLocks noChangeAspect="1"/>
+          </p:cNvPicPr>
+          <p:nvPr/>
+        </p:nvPicPr>
+        <p:blipFill>
+          <a:blip r:embed="rId2"/>
+          <a:stretch>
+            <a:fillRect/>
+          </a:stretch>
+        </p:blipFill>
+        <p:spPr>
+          <a:xfrm>
+            <a:off x="7259731" y="6280616"/>
+            <a:ext cx="3714750" cy="428625"/>
+          </a:xfrm>
+          <a:prstGeom prst="rect">
+            <a:avLst/>
+          </a:prstGeom>
+        </p:spPr>
+      </p:pic>
+      <p:pic>
+        <p:nvPicPr>
+          <p:cNvPr id="12" name="Picture 11">
+            <a:extLst>
+              <a:ext uri="{FF2B5EF4-FFF2-40B4-BE49-F238E27FC236}">
+                <a16:creationId xmlns:a16="http://schemas.microsoft.com/office/drawing/2014/main" id="{845B8B9C-835D-483C-AC33-DC847E6916CC}"/>
+              </a:ext>
+            </a:extLst>
+          </p:cNvPr>
+          <p:cNvPicPr>
+            <a:picLocks noChangeAspect="1"/>
+          </p:cNvPicPr>
+          <p:nvPr/>
+        </p:nvPicPr>
+        <p:blipFill>
+          <a:blip r:embed="rId3"/>
+          <a:stretch>
+            <a:fillRect/>
+          </a:stretch>
+        </p:blipFill>
+        <p:spPr>
+          <a:xfrm>
+            <a:off x="8653180" y="6280616"/>
+            <a:ext cx="3219450" cy="542925"/>
+          </a:xfrm>
+          <a:prstGeom prst="rect">
+            <a:avLst/>
+          </a:prstGeom>
+        </p:spPr>
+      </p:pic>
+      <p:pic>
+        <p:nvPicPr>
+          <p:cNvPr id="24" name="Picture 23">
+            <a:extLst>
+              <a:ext uri="{FF2B5EF4-FFF2-40B4-BE49-F238E27FC236}">
+                <a16:creationId xmlns:a16="http://schemas.microsoft.com/office/drawing/2014/main" id="{7B20C7CD-F17D-421A-AF41-E42ED8DE0927}"/>
+              </a:ext>
+            </a:extLst>
+          </p:cNvPr>
+          <p:cNvPicPr>
+            <a:picLocks noChangeAspect="1"/>
+          </p:cNvPicPr>
+          <p:nvPr/>
+        </p:nvPicPr>
+        <p:blipFill>
+          <a:blip r:embed="rId4"/>
+          <a:stretch>
+            <a:fillRect/>
+          </a:stretch>
+        </p:blipFill>
+        <p:spPr>
+          <a:xfrm>
+            <a:off x="1981777" y="2000292"/>
+            <a:ext cx="3265341" cy="3265341"/>
+          </a:xfrm>
+          <a:prstGeom prst="rect">
+            <a:avLst/>
+          </a:prstGeom>
+        </p:spPr>
+      </p:pic>
+      <p:pic>
+        <p:nvPicPr>
+          <p:cNvPr id="5" name="Picture 4">
+            <a:extLst>
+              <a:ext uri="{FF2B5EF4-FFF2-40B4-BE49-F238E27FC236}">
+                <a16:creationId xmlns:a16="http://schemas.microsoft.com/office/drawing/2014/main" id="{FD718850-C04A-00BC-5448-379EB666A061}"/>
+              </a:ext>
+            </a:extLst>
+          </p:cNvPr>
+          <p:cNvPicPr>
+            <a:picLocks noChangeAspect="1"/>
+          </p:cNvPicPr>
+          <p:nvPr/>
+        </p:nvPicPr>
+        <p:blipFill>
+          <a:blip r:embed="rId5"/>
+          <a:stretch>
+            <a:fillRect/>
+          </a:stretch>
+        </p:blipFill>
+        <p:spPr>
+          <a:xfrm>
+            <a:off x="8778803" y="6118609"/>
+            <a:ext cx="3181794" cy="590632"/>
+          </a:xfrm>
+          <a:prstGeom prst="rect">
+            <a:avLst/>
+          </a:prstGeom>
+        </p:spPr>
+      </p:pic>
+      <p:sp>
+        <p:nvSpPr>
+          <p:cNvPr id="7" name="TextBox 6">
+            <a:extLst>
+              <a:ext uri="{FF2B5EF4-FFF2-40B4-BE49-F238E27FC236}">
+                <a16:creationId xmlns:a16="http://schemas.microsoft.com/office/drawing/2014/main" id="{D818DC43-1BF3-4BE7-6316-B2430E3E6F95}"/>
+              </a:ext>
+            </a:extLst>
+          </p:cNvPr>
+          <p:cNvSpPr txBox="1"/>
+          <p:nvPr/>
+        </p:nvSpPr>
+        <p:spPr>
+          <a:xfrm>
+            <a:off x="9117106" y="6406072"/>
+            <a:ext cx="3071802" cy="400110"/>
+          </a:xfrm>
+          <a:prstGeom prst="rect">
+            <a:avLst/>
+          </a:prstGeom>
+          <a:noFill/>
+        </p:spPr>
+        <p:txBody>
+          <a:bodyPr wrap="square" rtlCol="0">
+            <a:spAutoFit/>
+          </a:bodyPr>
+          <a:lstStyle/>
+          <a:p>
+            <a:r>
+              <a:rPr lang="fr-FR" sz="2000" dirty="0">
+                <a:solidFill>
+                  <a:srgbClr val="002060"/>
+                </a:solidFill>
+              </a:rPr>
+              <a:t>E4 - Filière Informatique - 8</a:t>
+            </a:r>
+          </a:p>
+        </p:txBody>
+      </p:sp>
+      <p:sp>
+        <p:nvSpPr>
+          <p:cNvPr id="8" name="TextBox 7">
+            <a:extLst>
+              <a:ext uri="{FF2B5EF4-FFF2-40B4-BE49-F238E27FC236}">
+                <a16:creationId xmlns:a16="http://schemas.microsoft.com/office/drawing/2014/main" id="{61E2C741-B627-7F00-AB20-7FD6B9BF16B7}"/>
+              </a:ext>
+            </a:extLst>
+          </p:cNvPr>
+          <p:cNvSpPr txBox="1"/>
+          <p:nvPr/>
+        </p:nvSpPr>
+        <p:spPr>
+          <a:xfrm>
+            <a:off x="5550239" y="2646682"/>
+            <a:ext cx="4365813" cy="2308324"/>
+          </a:xfrm>
+          <a:prstGeom prst="rect">
+            <a:avLst/>
+          </a:prstGeom>
+          <a:noFill/>
+        </p:spPr>
+        <p:txBody>
+          <a:bodyPr wrap="square">
+            <a:spAutoFit/>
+          </a:bodyPr>
+          <a:lstStyle/>
+          <a:p>
+            <a:pPr marL="285750" indent="-285750">
+              <a:buFont typeface="Arial" panose="020B0604020202020204" pitchFamily="34" charset="0"/>
+              <a:buChar char="•"/>
+            </a:pPr>
+            <a:r>
+              <a:rPr lang="fr-FR" sz="2400" dirty="0"/>
+              <a:t>Découverte des technos actuels dans le développement web </a:t>
+            </a:r>
+          </a:p>
+          <a:p>
+            <a:pPr marL="285750" indent="-285750">
+              <a:buFont typeface="Arial" panose="020B0604020202020204" pitchFamily="34" charset="0"/>
+              <a:buChar char="•"/>
+            </a:pPr>
+            <a:endParaRPr lang="fr-FR" sz="2400" dirty="0"/>
+          </a:p>
+          <a:p>
+            <a:pPr marL="285750" indent="-285750">
+              <a:buFont typeface="Arial" panose="020B0604020202020204" pitchFamily="34" charset="0"/>
+              <a:buChar char="•"/>
+            </a:pPr>
+            <a:r>
+              <a:rPr lang="fr-FR" sz="2400" dirty="0"/>
+              <a:t>Approfondissement de mes connaissances des APIs</a:t>
+            </a:r>
+          </a:p>
+        </p:txBody>
+      </p:sp>
+    </p:spTree>
+    <p:extLst>
+      <p:ext uri="{BB962C8B-B14F-4D97-AF65-F5344CB8AC3E}">
+        <p14:creationId xmlns:p14="http://schemas.microsoft.com/office/powerpoint/2010/main" val="1783822029"/>
+      </p:ext>
+    </p:extLst>
+  </p:cSld>
+  <p:clrMapOvr>
+    <a:masterClrMapping/>
+  </p:clrMapOvr>
+</p:sld>
+</file>
+
 <file path=ppt/slides/slide2.xml><?xml version="1.0" encoding="utf-8"?>
 <p:sld xmlns:a="http://schemas.openxmlformats.org/drawingml/2006/main" xmlns:r="http://schemas.openxmlformats.org/officeDocument/2006/relationships" xmlns:p="http://schemas.openxmlformats.org/presentationml/2006/main">
   <p:cSld>
@@ -1812,12 +2162,51 @@
           <a:chExt cx="0" cy="0"/>
         </a:xfrm>
       </p:grpSpPr>
+      <p:sp>
+        <p:nvSpPr>
+          <p:cNvPr id="2" name="TextBox 1">
+            <a:extLst>
+              <a:ext uri="{FF2B5EF4-FFF2-40B4-BE49-F238E27FC236}">
+                <a16:creationId xmlns:a16="http://schemas.microsoft.com/office/drawing/2014/main" id="{14CAC50F-0ABA-8083-F4A3-A7AE6672A939}"/>
+              </a:ext>
+            </a:extLst>
+          </p:cNvPr>
+          <p:cNvSpPr txBox="1"/>
+          <p:nvPr/>
+        </p:nvSpPr>
+        <p:spPr>
+          <a:xfrm>
+            <a:off x="3948010" y="165678"/>
+            <a:ext cx="7178466" cy="923330"/>
+          </a:xfrm>
+          <a:prstGeom prst="rect">
+            <a:avLst/>
+          </a:prstGeom>
+          <a:noFill/>
+        </p:spPr>
+        <p:txBody>
+          <a:bodyPr wrap="square">
+            <a:spAutoFit/>
+          </a:bodyPr>
+          <a:lstStyle/>
+          <a:p>
+            <a:r>
+              <a:rPr lang="en-US" sz="5400" dirty="0">
+                <a:solidFill>
+                  <a:srgbClr val="6E80A5"/>
+                </a:solidFill>
+              </a:rPr>
+              <a:t>Sommaire</a:t>
+            </a:r>
+          </a:p>
+        </p:txBody>
+      </p:sp>
       <p:pic>
         <p:nvPicPr>
-          <p:cNvPr id="6" name="Picture 5">
-            <a:extLst>
-              <a:ext uri="{FF2B5EF4-FFF2-40B4-BE49-F238E27FC236}">
-                <a16:creationId xmlns:a16="http://schemas.microsoft.com/office/drawing/2014/main" id="{7256D09A-2244-E10F-4E9B-EB75AD6BCC05}"/>
+          <p:cNvPr id="4" name="Picture 3">
+            <a:extLst>
+              <a:ext uri="{FF2B5EF4-FFF2-40B4-BE49-F238E27FC236}">
+                <a16:creationId xmlns:a16="http://schemas.microsoft.com/office/drawing/2014/main" id="{C2BD9248-0157-B7E5-3238-0FC90C541794}"/>
               </a:ext>
             </a:extLst>
           </p:cNvPr>
@@ -1834,8 +2223,8 @@
         </p:blipFill>
         <p:spPr>
           <a:xfrm>
-            <a:off x="7087312" y="6015953"/>
-            <a:ext cx="4039164" cy="676369"/>
+            <a:off x="7537243" y="5930216"/>
+            <a:ext cx="4124901" cy="762106"/>
           </a:xfrm>
           <a:prstGeom prst="rect">
             <a:avLst/>
@@ -1844,10 +2233,10 @@
       </p:pic>
       <p:sp>
         <p:nvSpPr>
-          <p:cNvPr id="4" name="TextBox 3">
-            <a:extLst>
-              <a:ext uri="{FF2B5EF4-FFF2-40B4-BE49-F238E27FC236}">
-                <a16:creationId xmlns:a16="http://schemas.microsoft.com/office/drawing/2014/main" id="{66D44E8E-EC45-93B2-3C28-06AF317BD5C4}"/>
+          <p:cNvPr id="5" name="TextBox 4">
+            <a:extLst>
+              <a:ext uri="{FF2B5EF4-FFF2-40B4-BE49-F238E27FC236}">
+                <a16:creationId xmlns:a16="http://schemas.microsoft.com/office/drawing/2014/main" id="{5B0A80DC-CE13-1D87-6CAB-1D856CE06041}"/>
               </a:ext>
             </a:extLst>
           </p:cNvPr>
@@ -1856,52 +2245,8 @@
         </p:nvSpPr>
         <p:spPr>
           <a:xfrm>
-            <a:off x="8252399" y="6292212"/>
-            <a:ext cx="3153398" cy="400110"/>
-          </a:xfrm>
-          <a:prstGeom prst="rect">
-            <a:avLst/>
-          </a:prstGeom>
-          <a:noFill/>
-        </p:spPr>
-        <p:txBody>
-          <a:bodyPr wrap="square" rtlCol="0">
-            <a:spAutoFit/>
-          </a:bodyPr>
-          <a:lstStyle/>
-          <a:p>
-            <a:r>
-              <a:rPr lang="fr-FR" sz="2000" dirty="0">
-                <a:solidFill>
-                  <a:srgbClr val="002060"/>
-                </a:solidFill>
-              </a:rPr>
-              <a:t>E4 - Filière Informatique -2</a:t>
-            </a:r>
-            <a:endParaRPr lang="en-US" sz="2000" dirty="0">
-              <a:solidFill>
-                <a:srgbClr val="002060"/>
-              </a:solidFill>
-            </a:endParaRPr>
-          </a:p>
-        </p:txBody>
-      </p:sp>
-      <p:sp>
-        <p:nvSpPr>
-          <p:cNvPr id="7" name="TextBox 6">
-            <a:extLst>
-              <a:ext uri="{FF2B5EF4-FFF2-40B4-BE49-F238E27FC236}">
-                <a16:creationId xmlns:a16="http://schemas.microsoft.com/office/drawing/2014/main" id="{ABB21FCF-3A35-761D-F15E-9400CEDD8DD2}"/>
-              </a:ext>
-            </a:extLst>
-          </p:cNvPr>
-          <p:cNvSpPr txBox="1"/>
-          <p:nvPr/>
-        </p:nvSpPr>
-        <p:spPr>
-          <a:xfrm>
-            <a:off x="3948010" y="165678"/>
-            <a:ext cx="7178466" cy="923330"/>
+            <a:off x="1663730" y="1503246"/>
+            <a:ext cx="3392663" cy="6247864"/>
           </a:xfrm>
           <a:prstGeom prst="rect">
             <a:avLst/>
@@ -1914,217 +2259,172 @@
           </a:bodyPr>
           <a:lstStyle/>
           <a:p>
-            <a:r>
-              <a:rPr lang="en-US" sz="5400" dirty="0">
-                <a:solidFill>
-                  <a:srgbClr val="6E80A5"/>
-                </a:solidFill>
-              </a:rPr>
+            <a:pPr marL="285750" indent="-285750">
+              <a:buFont typeface="Arial" panose="020B0604020202020204" pitchFamily="34" charset="0"/>
+              <a:buChar char="•"/>
+            </a:pPr>
+            <a:r>
+              <a:rPr lang="en-US" sz="2000" dirty="0"/>
               <a:t>Les attentes</a:t>
             </a:r>
+          </a:p>
+          <a:p>
+            <a:r>
+              <a:rPr lang="en-US" sz="2000" dirty="0"/>
+              <a:t> </a:t>
+            </a:r>
+            <a:endParaRPr lang="fr-FR" sz="2000" dirty="0"/>
+          </a:p>
+          <a:p>
+            <a:pPr marL="285750" indent="-285750">
+              <a:buFont typeface="Arial" panose="020B0604020202020204" pitchFamily="34" charset="0"/>
+              <a:buChar char="•"/>
+            </a:pPr>
+            <a:r>
+              <a:rPr lang="en-US" sz="2000" dirty="0"/>
+              <a:t>Qu’est ce qu’une API ?</a:t>
+            </a:r>
+          </a:p>
+          <a:p>
+            <a:pPr marL="285750" indent="-285750">
+              <a:buFont typeface="Arial" panose="020B0604020202020204" pitchFamily="34" charset="0"/>
+              <a:buChar char="•"/>
+            </a:pPr>
+            <a:endParaRPr lang="en-US" sz="2000" dirty="0"/>
+          </a:p>
+          <a:p>
+            <a:pPr marL="285750" indent="-285750">
+              <a:buFont typeface="Arial" panose="020B0604020202020204" pitchFamily="34" charset="0"/>
+              <a:buChar char="•"/>
+            </a:pPr>
+            <a:r>
+              <a:rPr lang="en-US" sz="2000" dirty="0"/>
+              <a:t>Requêtes API</a:t>
+            </a:r>
+          </a:p>
+          <a:p>
+            <a:pPr marL="285750" indent="-285750">
+              <a:buFont typeface="Arial" panose="020B0604020202020204" pitchFamily="34" charset="0"/>
+              <a:buChar char="•"/>
+            </a:pPr>
+            <a:endParaRPr lang="en-US" sz="2000" dirty="0"/>
+          </a:p>
+          <a:p>
+            <a:pPr marL="285750" indent="-285750">
+              <a:buFont typeface="Arial" panose="020B0604020202020204" pitchFamily="34" charset="0"/>
+              <a:buChar char="•"/>
+            </a:pPr>
+            <a:r>
+              <a:rPr lang="en-US" sz="2000" dirty="0"/>
+              <a:t>Fiabilité des données </a:t>
+            </a:r>
+          </a:p>
+          <a:p>
+            <a:pPr marL="285750" indent="-285750">
+              <a:buFont typeface="Arial" panose="020B0604020202020204" pitchFamily="34" charset="0"/>
+              <a:buChar char="•"/>
+            </a:pPr>
+            <a:endParaRPr lang="en-US" sz="2000" dirty="0"/>
+          </a:p>
+          <a:p>
+            <a:pPr marL="285750" indent="-285750">
+              <a:buFont typeface="Arial" panose="020B0604020202020204" pitchFamily="34" charset="0"/>
+              <a:buChar char="•"/>
+            </a:pPr>
+            <a:r>
+              <a:rPr lang="en-US" sz="2000" dirty="0"/>
+              <a:t>Sécurité des données</a:t>
+            </a:r>
+          </a:p>
+          <a:p>
+            <a:pPr marL="285750" indent="-285750">
+              <a:buFont typeface="Arial" panose="020B0604020202020204" pitchFamily="34" charset="0"/>
+              <a:buChar char="•"/>
+            </a:pPr>
+            <a:endParaRPr lang="en-US" sz="2000" dirty="0"/>
+          </a:p>
+          <a:p>
+            <a:pPr marL="285750" indent="-285750">
+              <a:buFont typeface="Arial" panose="020B0604020202020204" pitchFamily="34" charset="0"/>
+              <a:buChar char="•"/>
+            </a:pPr>
+            <a:r>
+              <a:rPr lang="en-US" sz="2000" dirty="0"/>
+              <a:t>Tracabilité des données</a:t>
+            </a:r>
+          </a:p>
+          <a:p>
+            <a:pPr marL="285750" indent="-285750">
+              <a:buFont typeface="Arial" panose="020B0604020202020204" pitchFamily="34" charset="0"/>
+              <a:buChar char="•"/>
+            </a:pPr>
+            <a:endParaRPr lang="en-US" sz="2000" dirty="0"/>
+          </a:p>
+          <a:p>
+            <a:pPr marL="285750" indent="-285750">
+              <a:buFont typeface="Arial" panose="020B0604020202020204" pitchFamily="34" charset="0"/>
+              <a:buChar char="•"/>
+            </a:pPr>
+            <a:r>
+              <a:rPr lang="en-US" sz="2000" dirty="0"/>
+              <a:t>Lien académique</a:t>
+            </a:r>
+          </a:p>
+          <a:p>
+            <a:pPr marL="285750" indent="-285750">
+              <a:buFont typeface="Arial" panose="020B0604020202020204" pitchFamily="34" charset="0"/>
+              <a:buChar char="•"/>
+            </a:pPr>
+            <a:endParaRPr lang="en-US" sz="2000" dirty="0"/>
+          </a:p>
+          <a:p>
+            <a:pPr marL="285750" indent="-285750">
+              <a:buFont typeface="Arial" panose="020B0604020202020204" pitchFamily="34" charset="0"/>
+              <a:buChar char="•"/>
+            </a:pPr>
+            <a:endParaRPr lang="en-US" sz="2000" dirty="0"/>
+          </a:p>
+          <a:p>
+            <a:pPr marL="285750" indent="-285750">
+              <a:buFont typeface="Arial" panose="020B0604020202020204" pitchFamily="34" charset="0"/>
+              <a:buChar char="•"/>
+            </a:pPr>
+            <a:endParaRPr lang="en-US" sz="2000" dirty="0"/>
+          </a:p>
+          <a:p>
+            <a:pPr marL="285750" indent="-285750">
+              <a:buFont typeface="Arial" panose="020B0604020202020204" pitchFamily="34" charset="0"/>
+              <a:buChar char="•"/>
+            </a:pPr>
+            <a:endParaRPr lang="en-US" sz="2000" dirty="0"/>
+          </a:p>
+          <a:p>
+            <a:pPr marL="285750" indent="-285750">
+              <a:buFont typeface="Arial" panose="020B0604020202020204" pitchFamily="34" charset="0"/>
+              <a:buChar char="•"/>
+            </a:pPr>
+            <a:endParaRPr lang="en-US" sz="2000" dirty="0"/>
+          </a:p>
+          <a:p>
+            <a:pPr marL="285750" indent="-285750">
+              <a:buFont typeface="Arial" panose="020B0604020202020204" pitchFamily="34" charset="0"/>
+              <a:buChar char="•"/>
+            </a:pPr>
+            <a:endParaRPr lang="en-US" sz="2000" dirty="0"/>
+          </a:p>
+          <a:p>
+            <a:pPr marL="285750" indent="-285750">
+              <a:buFont typeface="Arial" panose="020B0604020202020204" pitchFamily="34" charset="0"/>
+              <a:buChar char="•"/>
+            </a:pPr>
+            <a:endParaRPr lang="fr-FR" sz="2000" dirty="0"/>
           </a:p>
         </p:txBody>
       </p:sp>
-      <p:sp>
-        <p:nvSpPr>
-          <p:cNvPr id="8" name="TextBox 7">
-            <a:extLst>
-              <a:ext uri="{FF2B5EF4-FFF2-40B4-BE49-F238E27FC236}">
-                <a16:creationId xmlns:a16="http://schemas.microsoft.com/office/drawing/2014/main" id="{056B8E90-52CB-4B40-B960-0EB7CE376AF2}"/>
-              </a:ext>
-            </a:extLst>
-          </p:cNvPr>
-          <p:cNvSpPr txBox="1"/>
-          <p:nvPr/>
-        </p:nvSpPr>
-        <p:spPr>
-          <a:xfrm>
-            <a:off x="1098506" y="5024718"/>
-            <a:ext cx="3153336" cy="369332"/>
-          </a:xfrm>
-          <a:prstGeom prst="rect">
-            <a:avLst/>
-          </a:prstGeom>
-          <a:noFill/>
-        </p:spPr>
-        <p:txBody>
-          <a:bodyPr wrap="square">
-            <a:spAutoFit/>
-          </a:bodyPr>
-          <a:lstStyle/>
-          <a:p>
-            <a:r>
-              <a:rPr lang="fr-FR" dirty="0"/>
-              <a:t>Amélioration du processus R&amp;D</a:t>
-            </a:r>
-          </a:p>
-        </p:txBody>
-      </p:sp>
-      <p:pic>
-        <p:nvPicPr>
-          <p:cNvPr id="10" name="Picture 9">
-            <a:extLst>
-              <a:ext uri="{FF2B5EF4-FFF2-40B4-BE49-F238E27FC236}">
-                <a16:creationId xmlns:a16="http://schemas.microsoft.com/office/drawing/2014/main" id="{E21F496D-F9F0-488D-B48A-141A11D6ED83}"/>
-              </a:ext>
-            </a:extLst>
-          </p:cNvPr>
-          <p:cNvPicPr>
-            <a:picLocks noChangeAspect="1"/>
-          </p:cNvPicPr>
-          <p:nvPr/>
-        </p:nvPicPr>
-        <p:blipFill>
-          <a:blip r:embed="rId3"/>
-          <a:stretch>
-            <a:fillRect/>
-          </a:stretch>
-        </p:blipFill>
-        <p:spPr>
-          <a:xfrm>
-            <a:off x="1545774" y="2614879"/>
-            <a:ext cx="2210437" cy="2210437"/>
-          </a:xfrm>
-          <a:prstGeom prst="rect">
-            <a:avLst/>
-          </a:prstGeom>
-        </p:spPr>
-      </p:pic>
-      <p:sp>
-        <p:nvSpPr>
-          <p:cNvPr id="11" name="TextBox 10">
-            <a:extLst>
-              <a:ext uri="{FF2B5EF4-FFF2-40B4-BE49-F238E27FC236}">
-                <a16:creationId xmlns:a16="http://schemas.microsoft.com/office/drawing/2014/main" id="{9C5CCCC5-DD6B-44A5-9A56-A5526027DCEB}"/>
-              </a:ext>
-            </a:extLst>
-          </p:cNvPr>
-          <p:cNvSpPr txBox="1"/>
-          <p:nvPr/>
-        </p:nvSpPr>
-        <p:spPr>
-          <a:xfrm>
-            <a:off x="4519332" y="5024718"/>
-            <a:ext cx="3153336" cy="369332"/>
-          </a:xfrm>
-          <a:prstGeom prst="rect">
-            <a:avLst/>
-          </a:prstGeom>
-          <a:noFill/>
-        </p:spPr>
-        <p:txBody>
-          <a:bodyPr wrap="square">
-            <a:spAutoFit/>
-          </a:bodyPr>
-          <a:lstStyle/>
-          <a:p>
-            <a:r>
-              <a:rPr lang="fr-FR" dirty="0"/>
-              <a:t>Solution plus robuste que excel</a:t>
-            </a:r>
-          </a:p>
-        </p:txBody>
-      </p:sp>
-      <p:sp>
-        <p:nvSpPr>
-          <p:cNvPr id="12" name="TextBox 11">
-            <a:extLst>
-              <a:ext uri="{FF2B5EF4-FFF2-40B4-BE49-F238E27FC236}">
-                <a16:creationId xmlns:a16="http://schemas.microsoft.com/office/drawing/2014/main" id="{584BF1BF-E7E4-4FCF-A2DE-0616C69A21E3}"/>
-              </a:ext>
-            </a:extLst>
-          </p:cNvPr>
-          <p:cNvSpPr txBox="1"/>
-          <p:nvPr/>
-        </p:nvSpPr>
-        <p:spPr>
-          <a:xfrm>
-            <a:off x="8149526" y="5024718"/>
-            <a:ext cx="3153336" cy="646331"/>
-          </a:xfrm>
-          <a:prstGeom prst="rect">
-            <a:avLst/>
-          </a:prstGeom>
-          <a:noFill/>
-        </p:spPr>
-        <p:txBody>
-          <a:bodyPr wrap="square">
-            <a:spAutoFit/>
-          </a:bodyPr>
-          <a:lstStyle/>
-          <a:p>
-            <a:pPr algn="ctr"/>
-            <a:r>
-              <a:rPr lang="fr-FR" dirty="0"/>
-              <a:t>Rechercher une machine via un QR code</a:t>
-            </a:r>
-          </a:p>
-        </p:txBody>
-      </p:sp>
-      <p:pic>
-        <p:nvPicPr>
-          <p:cNvPr id="14" name="Picture 13">
-            <a:extLst>
-              <a:ext uri="{FF2B5EF4-FFF2-40B4-BE49-F238E27FC236}">
-                <a16:creationId xmlns:a16="http://schemas.microsoft.com/office/drawing/2014/main" id="{7C175EFA-5847-4873-83B4-66E7D3E9BF72}"/>
-              </a:ext>
-            </a:extLst>
-          </p:cNvPr>
-          <p:cNvPicPr>
-            <a:picLocks noChangeAspect="1"/>
-          </p:cNvPicPr>
-          <p:nvPr/>
-        </p:nvPicPr>
-        <p:blipFill>
-          <a:blip r:embed="rId4"/>
-          <a:stretch>
-            <a:fillRect/>
-          </a:stretch>
-        </p:blipFill>
-        <p:spPr>
-          <a:xfrm>
-            <a:off x="8085448" y="2503329"/>
-            <a:ext cx="3217414" cy="2210437"/>
-          </a:xfrm>
-          <a:prstGeom prst="rect">
-            <a:avLst/>
-          </a:prstGeom>
-        </p:spPr>
-      </p:pic>
-      <p:pic>
-        <p:nvPicPr>
-          <p:cNvPr id="16" name="Picture 15">
-            <a:extLst>
-              <a:ext uri="{FF2B5EF4-FFF2-40B4-BE49-F238E27FC236}">
-                <a16:creationId xmlns:a16="http://schemas.microsoft.com/office/drawing/2014/main" id="{61A79975-A377-4827-A4A1-0823B1A429A5}"/>
-              </a:ext>
-            </a:extLst>
-          </p:cNvPr>
-          <p:cNvPicPr>
-            <a:picLocks noChangeAspect="1"/>
-          </p:cNvPicPr>
-          <p:nvPr/>
-        </p:nvPicPr>
-        <p:blipFill>
-          <a:blip r:embed="rId5"/>
-          <a:stretch>
-            <a:fillRect/>
-          </a:stretch>
-        </p:blipFill>
-        <p:spPr>
-          <a:xfrm>
-            <a:off x="4811397" y="2543670"/>
-            <a:ext cx="2275915" cy="2275915"/>
-          </a:xfrm>
-          <a:prstGeom prst="rect">
-            <a:avLst/>
-          </a:prstGeom>
-        </p:spPr>
-      </p:pic>
     </p:spTree>
     <p:extLst>
       <p:ext uri="{BB962C8B-B14F-4D97-AF65-F5344CB8AC3E}">
-        <p14:creationId xmlns:p14="http://schemas.microsoft.com/office/powerpoint/2010/main" val="2257210003"/>
+        <p14:creationId xmlns:p14="http://schemas.microsoft.com/office/powerpoint/2010/main" val="887062118"/>
       </p:ext>
     </p:extLst>
   </p:cSld>
@@ -2195,7 +2495,346 @@
         </p:nvSpPr>
         <p:spPr>
           <a:xfrm>
-            <a:off x="8270328" y="6292212"/>
+            <a:off x="9226619" y="6457890"/>
+            <a:ext cx="3153398" cy="400110"/>
+          </a:xfrm>
+          <a:prstGeom prst="rect">
+            <a:avLst/>
+          </a:prstGeom>
+          <a:noFill/>
+        </p:spPr>
+        <p:txBody>
+          <a:bodyPr wrap="square" rtlCol="0">
+            <a:spAutoFit/>
+          </a:bodyPr>
+          <a:lstStyle/>
+          <a:p>
+            <a:r>
+              <a:rPr lang="fr-FR" sz="2000" dirty="0">
+                <a:solidFill>
+                  <a:srgbClr val="002060"/>
+                </a:solidFill>
+              </a:rPr>
+              <a:t>E4 - Filière Informatique -1</a:t>
+            </a:r>
+            <a:endParaRPr lang="en-US" sz="2000" dirty="0">
+              <a:solidFill>
+                <a:srgbClr val="002060"/>
+              </a:solidFill>
+            </a:endParaRPr>
+          </a:p>
+        </p:txBody>
+      </p:sp>
+      <p:sp>
+        <p:nvSpPr>
+          <p:cNvPr id="7" name="TextBox 6">
+            <a:extLst>
+              <a:ext uri="{FF2B5EF4-FFF2-40B4-BE49-F238E27FC236}">
+                <a16:creationId xmlns:a16="http://schemas.microsoft.com/office/drawing/2014/main" id="{ABB21FCF-3A35-761D-F15E-9400CEDD8DD2}"/>
+              </a:ext>
+            </a:extLst>
+          </p:cNvPr>
+          <p:cNvSpPr txBox="1"/>
+          <p:nvPr/>
+        </p:nvSpPr>
+        <p:spPr>
+          <a:xfrm>
+            <a:off x="3948010" y="165678"/>
+            <a:ext cx="7178466" cy="923330"/>
+          </a:xfrm>
+          <a:prstGeom prst="rect">
+            <a:avLst/>
+          </a:prstGeom>
+          <a:noFill/>
+        </p:spPr>
+        <p:txBody>
+          <a:bodyPr wrap="square">
+            <a:spAutoFit/>
+          </a:bodyPr>
+          <a:lstStyle/>
+          <a:p>
+            <a:r>
+              <a:rPr lang="en-US" sz="5400" dirty="0">
+                <a:solidFill>
+                  <a:srgbClr val="6E80A5"/>
+                </a:solidFill>
+              </a:rPr>
+              <a:t>Les attentes</a:t>
+            </a:r>
+          </a:p>
+        </p:txBody>
+      </p:sp>
+      <p:sp>
+        <p:nvSpPr>
+          <p:cNvPr id="8" name="TextBox 7">
+            <a:extLst>
+              <a:ext uri="{FF2B5EF4-FFF2-40B4-BE49-F238E27FC236}">
+                <a16:creationId xmlns:a16="http://schemas.microsoft.com/office/drawing/2014/main" id="{056B8E90-52CB-4B40-B960-0EB7CE376AF2}"/>
+              </a:ext>
+            </a:extLst>
+          </p:cNvPr>
+          <p:cNvSpPr txBox="1"/>
+          <p:nvPr/>
+        </p:nvSpPr>
+        <p:spPr>
+          <a:xfrm>
+            <a:off x="1098506" y="5024718"/>
+            <a:ext cx="3153336" cy="369332"/>
+          </a:xfrm>
+          <a:prstGeom prst="rect">
+            <a:avLst/>
+          </a:prstGeom>
+          <a:noFill/>
+        </p:spPr>
+        <p:txBody>
+          <a:bodyPr wrap="square">
+            <a:spAutoFit/>
+          </a:bodyPr>
+          <a:lstStyle/>
+          <a:p>
+            <a:r>
+              <a:rPr lang="fr-FR" dirty="0"/>
+              <a:t>Amélioration du processus R&amp;D</a:t>
+            </a:r>
+          </a:p>
+        </p:txBody>
+      </p:sp>
+      <p:pic>
+        <p:nvPicPr>
+          <p:cNvPr id="10" name="Picture 9">
+            <a:extLst>
+              <a:ext uri="{FF2B5EF4-FFF2-40B4-BE49-F238E27FC236}">
+                <a16:creationId xmlns:a16="http://schemas.microsoft.com/office/drawing/2014/main" id="{E21F496D-F9F0-488D-B48A-141A11D6ED83}"/>
+              </a:ext>
+            </a:extLst>
+          </p:cNvPr>
+          <p:cNvPicPr>
+            <a:picLocks noChangeAspect="1"/>
+          </p:cNvPicPr>
+          <p:nvPr/>
+        </p:nvPicPr>
+        <p:blipFill>
+          <a:blip r:embed="rId3"/>
+          <a:stretch>
+            <a:fillRect/>
+          </a:stretch>
+        </p:blipFill>
+        <p:spPr>
+          <a:xfrm>
+            <a:off x="1545774" y="2614879"/>
+            <a:ext cx="2210437" cy="2210437"/>
+          </a:xfrm>
+          <a:prstGeom prst="rect">
+            <a:avLst/>
+          </a:prstGeom>
+        </p:spPr>
+      </p:pic>
+      <p:sp>
+        <p:nvSpPr>
+          <p:cNvPr id="11" name="TextBox 10">
+            <a:extLst>
+              <a:ext uri="{FF2B5EF4-FFF2-40B4-BE49-F238E27FC236}">
+                <a16:creationId xmlns:a16="http://schemas.microsoft.com/office/drawing/2014/main" id="{9C5CCCC5-DD6B-44A5-9A56-A5526027DCEB}"/>
+              </a:ext>
+            </a:extLst>
+          </p:cNvPr>
+          <p:cNvSpPr txBox="1"/>
+          <p:nvPr/>
+        </p:nvSpPr>
+        <p:spPr>
+          <a:xfrm>
+            <a:off x="4624016" y="5024718"/>
+            <a:ext cx="3153336" cy="369332"/>
+          </a:xfrm>
+          <a:prstGeom prst="rect">
+            <a:avLst/>
+          </a:prstGeom>
+          <a:noFill/>
+        </p:spPr>
+        <p:txBody>
+          <a:bodyPr wrap="square">
+            <a:spAutoFit/>
+          </a:bodyPr>
+          <a:lstStyle/>
+          <a:p>
+            <a:r>
+              <a:rPr lang="fr-FR" dirty="0"/>
+              <a:t>Solution plus robuste que Excel</a:t>
+            </a:r>
+          </a:p>
+        </p:txBody>
+      </p:sp>
+      <p:sp>
+        <p:nvSpPr>
+          <p:cNvPr id="12" name="TextBox 11">
+            <a:extLst>
+              <a:ext uri="{FF2B5EF4-FFF2-40B4-BE49-F238E27FC236}">
+                <a16:creationId xmlns:a16="http://schemas.microsoft.com/office/drawing/2014/main" id="{584BF1BF-E7E4-4FCF-A2DE-0616C69A21E3}"/>
+              </a:ext>
+            </a:extLst>
+          </p:cNvPr>
+          <p:cNvSpPr txBox="1"/>
+          <p:nvPr/>
+        </p:nvSpPr>
+        <p:spPr>
+          <a:xfrm>
+            <a:off x="8149526" y="5024718"/>
+            <a:ext cx="3153336" cy="646331"/>
+          </a:xfrm>
+          <a:prstGeom prst="rect">
+            <a:avLst/>
+          </a:prstGeom>
+          <a:noFill/>
+        </p:spPr>
+        <p:txBody>
+          <a:bodyPr wrap="square">
+            <a:spAutoFit/>
+          </a:bodyPr>
+          <a:lstStyle/>
+          <a:p>
+            <a:pPr algn="ctr"/>
+            <a:r>
+              <a:rPr lang="fr-FR" dirty="0"/>
+              <a:t>Rechercher une machine via un QR code</a:t>
+            </a:r>
+          </a:p>
+        </p:txBody>
+      </p:sp>
+      <p:pic>
+        <p:nvPicPr>
+          <p:cNvPr id="14" name="Picture 13">
+            <a:extLst>
+              <a:ext uri="{FF2B5EF4-FFF2-40B4-BE49-F238E27FC236}">
+                <a16:creationId xmlns:a16="http://schemas.microsoft.com/office/drawing/2014/main" id="{7C175EFA-5847-4873-83B4-66E7D3E9BF72}"/>
+              </a:ext>
+            </a:extLst>
+          </p:cNvPr>
+          <p:cNvPicPr>
+            <a:picLocks noChangeAspect="1"/>
+          </p:cNvPicPr>
+          <p:nvPr/>
+        </p:nvPicPr>
+        <p:blipFill>
+          <a:blip r:embed="rId4"/>
+          <a:stretch>
+            <a:fillRect/>
+          </a:stretch>
+        </p:blipFill>
+        <p:spPr>
+          <a:xfrm>
+            <a:off x="8085448" y="2503329"/>
+            <a:ext cx="3217414" cy="2210437"/>
+          </a:xfrm>
+          <a:prstGeom prst="rect">
+            <a:avLst/>
+          </a:prstGeom>
+        </p:spPr>
+      </p:pic>
+      <p:pic>
+        <p:nvPicPr>
+          <p:cNvPr id="16" name="Picture 15">
+            <a:extLst>
+              <a:ext uri="{FF2B5EF4-FFF2-40B4-BE49-F238E27FC236}">
+                <a16:creationId xmlns:a16="http://schemas.microsoft.com/office/drawing/2014/main" id="{61A79975-A377-4827-A4A1-0823B1A429A5}"/>
+              </a:ext>
+            </a:extLst>
+          </p:cNvPr>
+          <p:cNvPicPr>
+            <a:picLocks noChangeAspect="1"/>
+          </p:cNvPicPr>
+          <p:nvPr/>
+        </p:nvPicPr>
+        <p:blipFill>
+          <a:blip r:embed="rId5"/>
+          <a:stretch>
+            <a:fillRect/>
+          </a:stretch>
+        </p:blipFill>
+        <p:spPr>
+          <a:xfrm>
+            <a:off x="4958042" y="2549401"/>
+            <a:ext cx="2275915" cy="2275915"/>
+          </a:xfrm>
+          <a:prstGeom prst="rect">
+            <a:avLst/>
+          </a:prstGeom>
+        </p:spPr>
+      </p:pic>
+    </p:spTree>
+    <p:extLst>
+      <p:ext uri="{BB962C8B-B14F-4D97-AF65-F5344CB8AC3E}">
+        <p14:creationId xmlns:p14="http://schemas.microsoft.com/office/powerpoint/2010/main" val="2257210003"/>
+      </p:ext>
+    </p:extLst>
+  </p:cSld>
+  <p:clrMapOvr>
+    <a:masterClrMapping/>
+  </p:clrMapOvr>
+</p:sld>
+</file>
+
+<file path=ppt/slides/slide4.xml><?xml version="1.0" encoding="utf-8"?>
+<p:sld xmlns:a="http://schemas.openxmlformats.org/drawingml/2006/main" xmlns:r="http://schemas.openxmlformats.org/officeDocument/2006/relationships" xmlns:p="http://schemas.openxmlformats.org/presentationml/2006/main">
+  <p:cSld>
+    <p:spTree>
+      <p:nvGrpSpPr>
+        <p:cNvPr id="1" name=""/>
+        <p:cNvGrpSpPr/>
+        <p:nvPr/>
+      </p:nvGrpSpPr>
+      <p:grpSpPr>
+        <a:xfrm>
+          <a:off x="0" y="0"/>
+          <a:ext cx="0" cy="0"/>
+          <a:chOff x="0" y="0"/>
+          <a:chExt cx="0" cy="0"/>
+        </a:xfrm>
+      </p:grpSpPr>
+      <p:pic>
+        <p:nvPicPr>
+          <p:cNvPr id="6" name="Picture 5">
+            <a:extLst>
+              <a:ext uri="{FF2B5EF4-FFF2-40B4-BE49-F238E27FC236}">
+                <a16:creationId xmlns:a16="http://schemas.microsoft.com/office/drawing/2014/main" id="{7256D09A-2244-E10F-4E9B-EB75AD6BCC05}"/>
+              </a:ext>
+            </a:extLst>
+          </p:cNvPr>
+          <p:cNvPicPr>
+            <a:picLocks noChangeAspect="1"/>
+          </p:cNvPicPr>
+          <p:nvPr/>
+        </p:nvPicPr>
+        <p:blipFill>
+          <a:blip r:embed="rId2"/>
+          <a:stretch>
+            <a:fillRect/>
+          </a:stretch>
+        </p:blipFill>
+        <p:spPr>
+          <a:xfrm>
+            <a:off x="7087312" y="6015953"/>
+            <a:ext cx="4039164" cy="676369"/>
+          </a:xfrm>
+          <a:prstGeom prst="rect">
+            <a:avLst/>
+          </a:prstGeom>
+        </p:spPr>
+      </p:pic>
+      <p:sp>
+        <p:nvSpPr>
+          <p:cNvPr id="4" name="TextBox 3">
+            <a:extLst>
+              <a:ext uri="{FF2B5EF4-FFF2-40B4-BE49-F238E27FC236}">
+                <a16:creationId xmlns:a16="http://schemas.microsoft.com/office/drawing/2014/main" id="{66D44E8E-EC45-93B2-3C28-06AF317BD5C4}"/>
+              </a:ext>
+            </a:extLst>
+          </p:cNvPr>
+          <p:cNvSpPr txBox="1"/>
+          <p:nvPr/>
+        </p:nvSpPr>
+        <p:spPr>
+          <a:xfrm>
+            <a:off x="9176182" y="6457890"/>
             <a:ext cx="3153398" cy="400110"/>
           </a:xfrm>
           <a:prstGeom prst="rect">
@@ -2307,7 +2946,7 @@
 </p:sld>
 </file>
 
-<file path=ppt/slides/slide4.xml><?xml version="1.0" encoding="utf-8"?>
+<file path=ppt/slides/slide5.xml><?xml version="1.0" encoding="utf-8"?>
 <p:sld xmlns:a="http://schemas.openxmlformats.org/drawingml/2006/main" xmlns:r="http://schemas.openxmlformats.org/officeDocument/2006/relationships" xmlns:p="http://schemas.openxmlformats.org/presentationml/2006/main">
   <p:cSld>
     <p:spTree>
@@ -2374,7 +3013,7 @@
         </p:nvSpPr>
         <p:spPr>
           <a:xfrm>
-            <a:off x="8243434" y="6344161"/>
+            <a:off x="9217655" y="6457890"/>
             <a:ext cx="3153398" cy="400110"/>
           </a:xfrm>
           <a:prstGeom prst="rect">
@@ -2394,7 +3033,7 @@
                   <a:srgbClr val="002060"/>
                 </a:solidFill>
               </a:rPr>
-              <a:t>E4 - Filière Informatique -2</a:t>
+              <a:t>E4 - Filière Informatique -3</a:t>
             </a:r>
             <a:endParaRPr lang="en-US" sz="2000" dirty="0">
               <a:solidFill>
@@ -2470,7 +3109,7 @@
         </p:blipFill>
         <p:spPr>
           <a:xfrm>
-            <a:off x="1739762" y="1282688"/>
+            <a:off x="1374095" y="1211823"/>
             <a:ext cx="9752381" cy="5009524"/>
           </a:xfrm>
           <a:prstGeom prst="rect">
@@ -2482,286 +3121,6 @@
     <p:extLst>
       <p:ext uri="{BB962C8B-B14F-4D97-AF65-F5344CB8AC3E}">
         <p14:creationId xmlns:p14="http://schemas.microsoft.com/office/powerpoint/2010/main" val="3526951483"/>
-      </p:ext>
-    </p:extLst>
-  </p:cSld>
-  <p:clrMapOvr>
-    <a:masterClrMapping/>
-  </p:clrMapOvr>
-</p:sld>
-</file>
-
-<file path=ppt/slides/slide5.xml><?xml version="1.0" encoding="utf-8"?>
-<p:sld xmlns:a="http://schemas.openxmlformats.org/drawingml/2006/main" xmlns:r="http://schemas.openxmlformats.org/officeDocument/2006/relationships" xmlns:p="http://schemas.openxmlformats.org/presentationml/2006/main">
-  <p:cSld>
-    <p:spTree>
-      <p:nvGrpSpPr>
-        <p:cNvPr id="1" name=""/>
-        <p:cNvGrpSpPr/>
-        <p:nvPr/>
-      </p:nvGrpSpPr>
-      <p:grpSpPr>
-        <a:xfrm>
-          <a:off x="0" y="0"/>
-          <a:ext cx="0" cy="0"/>
-          <a:chOff x="0" y="0"/>
-          <a:chExt cx="0" cy="0"/>
-        </a:xfrm>
-      </p:grpSpPr>
-      <p:sp>
-        <p:nvSpPr>
-          <p:cNvPr id="2" name="TextBox 1">
-            <a:extLst>
-              <a:ext uri="{FF2B5EF4-FFF2-40B4-BE49-F238E27FC236}">
-                <a16:creationId xmlns:a16="http://schemas.microsoft.com/office/drawing/2014/main" id="{FD48528C-E21E-17D7-17B5-4B5CE2959294}"/>
-              </a:ext>
-            </a:extLst>
-          </p:cNvPr>
-          <p:cNvSpPr txBox="1"/>
-          <p:nvPr/>
-        </p:nvSpPr>
-        <p:spPr>
-          <a:xfrm>
-            <a:off x="3836914" y="174223"/>
-            <a:ext cx="7178466" cy="923330"/>
-          </a:xfrm>
-          <a:prstGeom prst="rect">
-            <a:avLst/>
-          </a:prstGeom>
-          <a:noFill/>
-        </p:spPr>
-        <p:txBody>
-          <a:bodyPr wrap="square">
-            <a:spAutoFit/>
-          </a:bodyPr>
-          <a:lstStyle/>
-          <a:p>
-            <a:r>
-              <a:rPr lang="fr-FR" sz="5400" dirty="0">
-                <a:solidFill>
-                  <a:srgbClr val="6E80A5"/>
-                </a:solidFill>
-              </a:rPr>
-              <a:t>Fiabilité des données </a:t>
-            </a:r>
-            <a:endParaRPr lang="en-US" sz="5400" dirty="0">
-              <a:solidFill>
-                <a:srgbClr val="6E80A5"/>
-              </a:solidFill>
-            </a:endParaRPr>
-          </a:p>
-        </p:txBody>
-      </p:sp>
-      <p:pic>
-        <p:nvPicPr>
-          <p:cNvPr id="4" name="Picture 3">
-            <a:extLst>
-              <a:ext uri="{FF2B5EF4-FFF2-40B4-BE49-F238E27FC236}">
-                <a16:creationId xmlns:a16="http://schemas.microsoft.com/office/drawing/2014/main" id="{52BFF47E-2DDE-4BD8-BBDA-98C6BEAAF4CF}"/>
-              </a:ext>
-            </a:extLst>
-          </p:cNvPr>
-          <p:cNvPicPr>
-            <a:picLocks noChangeAspect="1"/>
-          </p:cNvPicPr>
-          <p:nvPr/>
-        </p:nvPicPr>
-        <p:blipFill>
-          <a:blip r:embed="rId2"/>
-          <a:stretch>
-            <a:fillRect/>
-          </a:stretch>
-        </p:blipFill>
-        <p:spPr>
-          <a:xfrm>
-            <a:off x="2622729" y="2357436"/>
-            <a:ext cx="2143125" cy="2143125"/>
-          </a:xfrm>
-          <a:prstGeom prst="rect">
-            <a:avLst/>
-          </a:prstGeom>
-        </p:spPr>
-      </p:pic>
-      <p:sp>
-        <p:nvSpPr>
-          <p:cNvPr id="5" name="TextBox 4">
-            <a:extLst>
-              <a:ext uri="{FF2B5EF4-FFF2-40B4-BE49-F238E27FC236}">
-                <a16:creationId xmlns:a16="http://schemas.microsoft.com/office/drawing/2014/main" id="{BFD34F7C-A178-4E91-B9B2-1B20ADE5D82A}"/>
-              </a:ext>
-            </a:extLst>
-          </p:cNvPr>
-          <p:cNvSpPr txBox="1"/>
-          <p:nvPr/>
-        </p:nvSpPr>
-        <p:spPr>
-          <a:xfrm>
-            <a:off x="2260246" y="4805084"/>
-            <a:ext cx="3153336" cy="646331"/>
-          </a:xfrm>
-          <a:prstGeom prst="rect">
-            <a:avLst/>
-          </a:prstGeom>
-          <a:noFill/>
-        </p:spPr>
-        <p:txBody>
-          <a:bodyPr wrap="square">
-            <a:spAutoFit/>
-          </a:bodyPr>
-          <a:lstStyle/>
-          <a:p>
-            <a:pPr algn="ctr"/>
-            <a:r>
-              <a:rPr lang="fr-FR" dirty="0"/>
-              <a:t>Manipulation de chaines de caractères</a:t>
-            </a:r>
-          </a:p>
-        </p:txBody>
-      </p:sp>
-      <p:sp>
-        <p:nvSpPr>
-          <p:cNvPr id="6" name="TextBox 5">
-            <a:extLst>
-              <a:ext uri="{FF2B5EF4-FFF2-40B4-BE49-F238E27FC236}">
-                <a16:creationId xmlns:a16="http://schemas.microsoft.com/office/drawing/2014/main" id="{A032C8B0-D9EC-4F35-8E00-C2D47E092E6C}"/>
-              </a:ext>
-            </a:extLst>
-          </p:cNvPr>
-          <p:cNvSpPr txBox="1"/>
-          <p:nvPr/>
-        </p:nvSpPr>
-        <p:spPr>
-          <a:xfrm>
-            <a:off x="6921040" y="4805084"/>
-            <a:ext cx="3153336" cy="369332"/>
-          </a:xfrm>
-          <a:prstGeom prst="rect">
-            <a:avLst/>
-          </a:prstGeom>
-          <a:noFill/>
-        </p:spPr>
-        <p:txBody>
-          <a:bodyPr wrap="square">
-            <a:spAutoFit/>
-          </a:bodyPr>
-          <a:lstStyle/>
-          <a:p>
-            <a:pPr algn="ctr"/>
-            <a:r>
-              <a:rPr lang="fr-FR" dirty="0"/>
-              <a:t>Protocole de vérification </a:t>
-            </a:r>
-          </a:p>
-        </p:txBody>
-      </p:sp>
-      <p:pic>
-        <p:nvPicPr>
-          <p:cNvPr id="10" name="Picture 9">
-            <a:extLst>
-              <a:ext uri="{FF2B5EF4-FFF2-40B4-BE49-F238E27FC236}">
-                <a16:creationId xmlns:a16="http://schemas.microsoft.com/office/drawing/2014/main" id="{4A8BDE43-44D4-4930-BB14-F91E9CBDBE30}"/>
-              </a:ext>
-            </a:extLst>
-          </p:cNvPr>
-          <p:cNvPicPr>
-            <a:picLocks noChangeAspect="1"/>
-          </p:cNvPicPr>
-          <p:nvPr/>
-        </p:nvPicPr>
-        <p:blipFill>
-          <a:blip r:embed="rId3"/>
-          <a:stretch>
-            <a:fillRect/>
-          </a:stretch>
-        </p:blipFill>
-        <p:spPr>
-          <a:xfrm>
-            <a:off x="7426146" y="2357437"/>
-            <a:ext cx="2143125" cy="2143125"/>
-          </a:xfrm>
-          <a:prstGeom prst="rect">
-            <a:avLst/>
-          </a:prstGeom>
-        </p:spPr>
-      </p:pic>
-      <p:pic>
-        <p:nvPicPr>
-          <p:cNvPr id="8" name="Picture 7">
-            <a:extLst>
-              <a:ext uri="{FF2B5EF4-FFF2-40B4-BE49-F238E27FC236}">
-                <a16:creationId xmlns:a16="http://schemas.microsoft.com/office/drawing/2014/main" id="{6EDB6DC2-A636-457B-A67D-411767F19FB1}"/>
-              </a:ext>
-            </a:extLst>
-          </p:cNvPr>
-          <p:cNvPicPr>
-            <a:picLocks noChangeAspect="1"/>
-          </p:cNvPicPr>
-          <p:nvPr/>
-        </p:nvPicPr>
-        <p:blipFill>
-          <a:blip r:embed="rId4"/>
-          <a:stretch>
-            <a:fillRect/>
-          </a:stretch>
-        </p:blipFill>
-        <p:spPr>
-          <a:xfrm>
-            <a:off x="7426146" y="6317901"/>
-            <a:ext cx="3715268" cy="428685"/>
-          </a:xfrm>
-          <a:prstGeom prst="rect">
-            <a:avLst/>
-          </a:prstGeom>
-        </p:spPr>
-      </p:pic>
-      <p:sp>
-        <p:nvSpPr>
-          <p:cNvPr id="7" name="TextBox 6">
-            <a:extLst>
-              <a:ext uri="{FF2B5EF4-FFF2-40B4-BE49-F238E27FC236}">
-                <a16:creationId xmlns:a16="http://schemas.microsoft.com/office/drawing/2014/main" id="{0EEA4A6C-B001-4D2A-AD1E-E5DFB28CEEB7}"/>
-              </a:ext>
-            </a:extLst>
-          </p:cNvPr>
-          <p:cNvSpPr txBox="1"/>
-          <p:nvPr/>
-        </p:nvSpPr>
-        <p:spPr>
-          <a:xfrm>
-            <a:off x="8198611" y="6315684"/>
-            <a:ext cx="3153398" cy="400110"/>
-          </a:xfrm>
-          <a:prstGeom prst="rect">
-            <a:avLst/>
-          </a:prstGeom>
-          <a:noFill/>
-        </p:spPr>
-        <p:txBody>
-          <a:bodyPr wrap="square" rtlCol="0">
-            <a:spAutoFit/>
-          </a:bodyPr>
-          <a:lstStyle/>
-          <a:p>
-            <a:r>
-              <a:rPr lang="fr-FR" sz="2000" dirty="0">
-                <a:solidFill>
-                  <a:srgbClr val="002060"/>
-                </a:solidFill>
-              </a:rPr>
-              <a:t>E4 - Filière Informatique -2</a:t>
-            </a:r>
-            <a:endParaRPr lang="en-US" sz="2000" dirty="0">
-              <a:solidFill>
-                <a:srgbClr val="002060"/>
-              </a:solidFill>
-            </a:endParaRPr>
-          </a:p>
-        </p:txBody>
-      </p:sp>
-    </p:spTree>
-    <p:extLst>
-      <p:ext uri="{BB962C8B-B14F-4D97-AF65-F5344CB8AC3E}">
-        <p14:creationId xmlns:p14="http://schemas.microsoft.com/office/powerpoint/2010/main" val="563044854"/>
       </p:ext>
     </p:extLst>
   </p:cSld>
@@ -2790,10 +3149,10 @@
       </p:grpSpPr>
       <p:sp>
         <p:nvSpPr>
-          <p:cNvPr id="5" name="TextBox 4">
-            <a:extLst>
-              <a:ext uri="{FF2B5EF4-FFF2-40B4-BE49-F238E27FC236}">
-                <a16:creationId xmlns:a16="http://schemas.microsoft.com/office/drawing/2014/main" id="{AA362123-24C2-C0BE-9B20-CC850A639E16}"/>
+          <p:cNvPr id="2" name="TextBox 1">
+            <a:extLst>
+              <a:ext uri="{FF2B5EF4-FFF2-40B4-BE49-F238E27FC236}">
+                <a16:creationId xmlns:a16="http://schemas.microsoft.com/office/drawing/2014/main" id="{FD48528C-E21E-17D7-17B5-4B5CE2959294}"/>
               </a:ext>
             </a:extLst>
           </p:cNvPr>
@@ -2817,82 +3176,18 @@
           <a:lstStyle/>
           <a:p>
             <a:r>
-              <a:rPr lang="en-US" sz="5400" i="0" dirty="0">
-                <a:solidFill>
-                  <a:srgbClr val="6E80A5"/>
-                </a:solidFill>
-                <a:effectLst/>
-              </a:rPr>
-              <a:t>S</a:t>
-            </a:r>
-            <a:r>
               <a:rPr lang="fr-FR" sz="5400" dirty="0">
                 <a:solidFill>
                   <a:srgbClr val="6E80A5"/>
                 </a:solidFill>
               </a:rPr>
-              <a:t>é</a:t>
-            </a:r>
-            <a:r>
-              <a:rPr lang="en-US" sz="5400" i="0" dirty="0">
-                <a:solidFill>
-                  <a:srgbClr val="6E80A5"/>
-                </a:solidFill>
-                <a:effectLst/>
-              </a:rPr>
-              <a:t>curit</a:t>
-            </a:r>
-            <a:r>
-              <a:rPr lang="fr-FR" sz="5400" dirty="0">
-                <a:solidFill>
-                  <a:srgbClr val="6E80A5"/>
-                </a:solidFill>
-              </a:rPr>
-              <a:t>é</a:t>
-            </a:r>
-            <a:r>
-              <a:rPr lang="en-US" sz="5400" i="0" dirty="0">
-                <a:solidFill>
-                  <a:srgbClr val="6E80A5"/>
-                </a:solidFill>
-                <a:effectLst/>
-              </a:rPr>
-              <a:t> des </a:t>
-            </a:r>
-            <a:r>
-              <a:rPr lang="en-US" sz="5400" dirty="0">
-                <a:solidFill>
-                  <a:srgbClr val="6E80A5"/>
-                </a:solidFill>
-              </a:rPr>
-              <a:t>d</a:t>
-            </a:r>
-            <a:r>
-              <a:rPr lang="en-US" sz="5400" i="0" dirty="0">
-                <a:solidFill>
-                  <a:srgbClr val="6E80A5"/>
-                </a:solidFill>
-                <a:effectLst/>
-              </a:rPr>
-              <a:t>onn</a:t>
-            </a:r>
-            <a:r>
-              <a:rPr lang="fr-FR" sz="5400" dirty="0">
-                <a:solidFill>
-                  <a:srgbClr val="6E80A5"/>
-                </a:solidFill>
-              </a:rPr>
-              <a:t>é</a:t>
-            </a:r>
-            <a:r>
-              <a:rPr lang="en-US" sz="5400" i="0" dirty="0">
-                <a:solidFill>
-                  <a:srgbClr val="6E80A5"/>
-                </a:solidFill>
-                <a:effectLst/>
-              </a:rPr>
-              <a:t>es</a:t>
-            </a:r>
+              <a:t>Fiabilité des données </a:t>
+            </a:r>
+            <a:endParaRPr lang="en-US" sz="5400" dirty="0">
+              <a:solidFill>
+                <a:srgbClr val="6E80A5"/>
+              </a:solidFill>
+            </a:endParaRPr>
           </a:p>
         </p:txBody>
       </p:sp>
@@ -2901,7 +3196,7 @@
           <p:cNvPr id="4" name="Picture 3">
             <a:extLst>
               <a:ext uri="{FF2B5EF4-FFF2-40B4-BE49-F238E27FC236}">
-                <a16:creationId xmlns:a16="http://schemas.microsoft.com/office/drawing/2014/main" id="{C4198DC7-9A71-4C38-AF71-4F8BF616FC6D}"/>
+                <a16:creationId xmlns:a16="http://schemas.microsoft.com/office/drawing/2014/main" id="{52BFF47E-2DDE-4BD8-BBDA-98C6BEAAF4CF}"/>
               </a:ext>
             </a:extLst>
           </p:cNvPr>
@@ -2918,8 +3213,38 @@
         </p:blipFill>
         <p:spPr>
           <a:xfrm>
-            <a:off x="7368924" y="6216987"/>
-            <a:ext cx="3673286" cy="466790"/>
+            <a:off x="2096101" y="1688186"/>
+            <a:ext cx="3481626" cy="3481626"/>
+          </a:xfrm>
+          <a:prstGeom prst="rect">
+            <a:avLst/>
+          </a:prstGeom>
+        </p:spPr>
+      </p:pic>
+      <p:pic>
+        <p:nvPicPr>
+          <p:cNvPr id="8" name="Picture 7">
+            <a:extLst>
+              <a:ext uri="{FF2B5EF4-FFF2-40B4-BE49-F238E27FC236}">
+                <a16:creationId xmlns:a16="http://schemas.microsoft.com/office/drawing/2014/main" id="{6EDB6DC2-A636-457B-A67D-411767F19FB1}"/>
+              </a:ext>
+            </a:extLst>
+          </p:cNvPr>
+          <p:cNvPicPr>
+            <a:picLocks noChangeAspect="1"/>
+          </p:cNvPicPr>
+          <p:nvPr/>
+        </p:nvPicPr>
+        <p:blipFill>
+          <a:blip r:embed="rId3"/>
+          <a:stretch>
+            <a:fillRect/>
+          </a:stretch>
+        </p:blipFill>
+        <p:spPr>
+          <a:xfrm>
+            <a:off x="7426146" y="6317901"/>
+            <a:ext cx="3715268" cy="428685"/>
           </a:xfrm>
           <a:prstGeom prst="rect">
             <a:avLst/>
@@ -2928,10 +3253,10 @@
       </p:pic>
       <p:sp>
         <p:nvSpPr>
-          <p:cNvPr id="3" name="TextBox 2">
-            <a:extLst>
-              <a:ext uri="{FF2B5EF4-FFF2-40B4-BE49-F238E27FC236}">
-                <a16:creationId xmlns:a16="http://schemas.microsoft.com/office/drawing/2014/main" id="{9EEA3A75-4604-458E-B486-1E5EE8E41D3D}"/>
+          <p:cNvPr id="7" name="TextBox 6">
+            <a:extLst>
+              <a:ext uri="{FF2B5EF4-FFF2-40B4-BE49-F238E27FC236}">
+                <a16:creationId xmlns:a16="http://schemas.microsoft.com/office/drawing/2014/main" id="{0EEA4A6C-B001-4D2A-AD1E-E5DFB28CEEB7}"/>
               </a:ext>
             </a:extLst>
           </p:cNvPr>
@@ -2940,7 +3265,7 @@
         </p:nvSpPr>
         <p:spPr>
           <a:xfrm>
-            <a:off x="7861982" y="6283667"/>
+            <a:off x="9164286" y="6457890"/>
             <a:ext cx="3153398" cy="400110"/>
           </a:xfrm>
           <a:prstGeom prst="rect">
@@ -2960,7 +3285,7 @@
                   <a:srgbClr val="002060"/>
                 </a:solidFill>
               </a:rPr>
-              <a:t>E4 - Filière Informatique -2</a:t>
+              <a:t>E4 - Filière Informatique - 4</a:t>
             </a:r>
             <a:endParaRPr lang="en-US" sz="2000" dirty="0">
               <a:solidFill>
@@ -2970,78 +3295,12 @@
           </a:p>
         </p:txBody>
       </p:sp>
-      <p:pic>
-        <p:nvPicPr>
-          <p:cNvPr id="6" name="Graphic 5">
-            <a:extLst>
-              <a:ext uri="{FF2B5EF4-FFF2-40B4-BE49-F238E27FC236}">
-                <a16:creationId xmlns:a16="http://schemas.microsoft.com/office/drawing/2014/main" id="{8749F0AB-3920-4E05-8A0C-01494C716E75}"/>
-              </a:ext>
-            </a:extLst>
-          </p:cNvPr>
-          <p:cNvPicPr>
-            <a:picLocks noChangeAspect="1"/>
-          </p:cNvPicPr>
-          <p:nvPr/>
-        </p:nvPicPr>
-        <p:blipFill>
-          <a:blip r:embed="rId3">
-            <a:extLst>
-              <a:ext uri="{96DAC541-7B7A-43D3-8B79-37D633B846F1}">
-                <asvg:svgBlip xmlns:asvg="http://schemas.microsoft.com/office/drawing/2016/SVG/main" r:embed="rId4"/>
-              </a:ext>
-            </a:extLst>
-          </a:blip>
-          <a:stretch>
-            <a:fillRect/>
-          </a:stretch>
-        </p:blipFill>
-        <p:spPr>
-          <a:xfrm>
-            <a:off x="1830200" y="1313316"/>
-            <a:ext cx="8531600" cy="4854623"/>
-          </a:xfrm>
-          <a:prstGeom prst="rect">
-            <a:avLst/>
-          </a:prstGeom>
-        </p:spPr>
-      </p:pic>
-      <p:pic>
-        <p:nvPicPr>
-          <p:cNvPr id="8" name="Picture 7">
-            <a:extLst>
-              <a:ext uri="{FF2B5EF4-FFF2-40B4-BE49-F238E27FC236}">
-                <a16:creationId xmlns:a16="http://schemas.microsoft.com/office/drawing/2014/main" id="{17E122D0-0ECD-4B94-9ED1-F04E2DC59FAB}"/>
-              </a:ext>
-            </a:extLst>
-          </p:cNvPr>
-          <p:cNvPicPr>
-            <a:picLocks noChangeAspect="1"/>
-          </p:cNvPicPr>
-          <p:nvPr/>
-        </p:nvPicPr>
-        <p:blipFill>
-          <a:blip r:embed="rId5"/>
-          <a:stretch>
-            <a:fillRect/>
-          </a:stretch>
-        </p:blipFill>
-        <p:spPr>
-          <a:xfrm>
-            <a:off x="7581306" y="6283667"/>
-            <a:ext cx="3714750" cy="428625"/>
-          </a:xfrm>
-          <a:prstGeom prst="rect">
-            <a:avLst/>
-          </a:prstGeom>
-        </p:spPr>
-      </p:pic>
       <p:sp>
         <p:nvSpPr>
-          <p:cNvPr id="7" name="TextBox 6">
-            <a:extLst>
-              <a:ext uri="{FF2B5EF4-FFF2-40B4-BE49-F238E27FC236}">
-                <a16:creationId xmlns:a16="http://schemas.microsoft.com/office/drawing/2014/main" id="{1B2F5423-36A1-4098-9171-476EAD2076A2}"/>
+          <p:cNvPr id="11" name="TextBox 10">
+            <a:extLst>
+              <a:ext uri="{FF2B5EF4-FFF2-40B4-BE49-F238E27FC236}">
+                <a16:creationId xmlns:a16="http://schemas.microsoft.com/office/drawing/2014/main" id="{9E4C067A-760C-8398-9A48-0DABB38D0F93}"/>
               </a:ext>
             </a:extLst>
           </p:cNvPr>
@@ -3050,8 +3309,8 @@
         </p:nvSpPr>
         <p:spPr>
           <a:xfrm>
-            <a:off x="7902227" y="6283667"/>
-            <a:ext cx="3153398" cy="400110"/>
+            <a:off x="5950721" y="1940072"/>
+            <a:ext cx="4365813" cy="3785652"/>
           </a:xfrm>
           <a:prstGeom prst="rect">
             <a:avLst/>
@@ -3059,31 +3318,57 @@
           <a:noFill/>
         </p:spPr>
         <p:txBody>
-          <a:bodyPr wrap="square" rtlCol="0">
+          <a:bodyPr wrap="square">
             <a:spAutoFit/>
           </a:bodyPr>
           <a:lstStyle/>
           <a:p>
-            <a:r>
-              <a:rPr lang="fr-FR" sz="2000" dirty="0">
-                <a:solidFill>
-                  <a:srgbClr val="002060"/>
-                </a:solidFill>
-              </a:rPr>
-              <a:t>E4 - Filière Informatique -2</a:t>
-            </a:r>
-            <a:endParaRPr lang="en-US" sz="2000" dirty="0">
-              <a:solidFill>
-                <a:srgbClr val="002060"/>
-              </a:solidFill>
-            </a:endParaRPr>
+            <a:pPr marL="285750" indent="-285750">
+              <a:buFont typeface="Arial" panose="020B0604020202020204" pitchFamily="34" charset="0"/>
+              <a:buChar char="•"/>
+            </a:pPr>
+            <a:r>
+              <a:rPr lang="en-US" sz="2400" dirty="0"/>
+              <a:t>Cohérence des données (respect d’un regex):</a:t>
+            </a:r>
+            <a:br>
+              <a:rPr lang="en-US" sz="2400" dirty="0"/>
+            </a:br>
+            <a:r>
+              <a:rPr lang="en-US" sz="2400" dirty="0"/>
+              <a:t>adresse-mail, numéro de téléphone</a:t>
+            </a:r>
+          </a:p>
+          <a:p>
+            <a:pPr marL="285750" indent="-285750">
+              <a:buFont typeface="Arial" panose="020B0604020202020204" pitchFamily="34" charset="0"/>
+              <a:buChar char="•"/>
+            </a:pPr>
+            <a:endParaRPr lang="fr-FR" sz="2400" dirty="0"/>
+          </a:p>
+          <a:p>
+            <a:pPr marL="285750" indent="-285750">
+              <a:buFont typeface="Arial" panose="020B0604020202020204" pitchFamily="34" charset="0"/>
+              <a:buChar char="•"/>
+            </a:pPr>
+            <a:r>
+              <a:rPr lang="en-US" sz="2400" dirty="0"/>
+              <a:t>Gestion des erreurs:</a:t>
+            </a:r>
+            <a:br>
+              <a:rPr lang="en-US" sz="2400" dirty="0"/>
+            </a:br>
+            <a:r>
+              <a:rPr lang="fr-FR" sz="2400" dirty="0"/>
+              <a:t>Utilisation des statuts (400, 401, 403, 500, etc.) pour indiquer la nature du problème.</a:t>
+            </a:r>
           </a:p>
         </p:txBody>
       </p:sp>
     </p:spTree>
     <p:extLst>
       <p:ext uri="{BB962C8B-B14F-4D97-AF65-F5344CB8AC3E}">
-        <p14:creationId xmlns:p14="http://schemas.microsoft.com/office/powerpoint/2010/main" val="97206983"/>
+        <p14:creationId xmlns:p14="http://schemas.microsoft.com/office/powerpoint/2010/main" val="563044854"/>
       </p:ext>
     </p:extLst>
   </p:cSld>
@@ -3112,10 +3397,10 @@
       </p:grpSpPr>
       <p:sp>
         <p:nvSpPr>
-          <p:cNvPr id="2" name="TextBox 1">
-            <a:extLst>
-              <a:ext uri="{FF2B5EF4-FFF2-40B4-BE49-F238E27FC236}">
-                <a16:creationId xmlns:a16="http://schemas.microsoft.com/office/drawing/2014/main" id="{A433333F-B7A6-064A-7DE0-83BF06D0DD42}"/>
+          <p:cNvPr id="5" name="TextBox 4">
+            <a:extLst>
+              <a:ext uri="{FF2B5EF4-FFF2-40B4-BE49-F238E27FC236}">
+                <a16:creationId xmlns:a16="http://schemas.microsoft.com/office/drawing/2014/main" id="{AA362123-24C2-C0BE-9B20-CC850A639E16}"/>
               </a:ext>
             </a:extLst>
           </p:cNvPr>
@@ -3124,7 +3409,7 @@
         </p:nvSpPr>
         <p:spPr>
           <a:xfrm>
-            <a:off x="3905280" y="165677"/>
+            <a:off x="3836914" y="174223"/>
             <a:ext cx="7178466" cy="923330"/>
           </a:xfrm>
           <a:prstGeom prst="rect">
@@ -3145,7 +3430,41 @@
                 </a:solidFill>
                 <a:effectLst/>
               </a:rPr>
-              <a:t>Tracabilité des </a:t>
+              <a:t>S</a:t>
+            </a:r>
+            <a:r>
+              <a:rPr lang="fr-FR" sz="5400" dirty="0">
+                <a:solidFill>
+                  <a:srgbClr val="6E80A5"/>
+                </a:solidFill>
+              </a:rPr>
+              <a:t>é</a:t>
+            </a:r>
+            <a:r>
+              <a:rPr lang="en-US" sz="5400" i="0" dirty="0">
+                <a:solidFill>
+                  <a:srgbClr val="6E80A5"/>
+                </a:solidFill>
+                <a:effectLst/>
+              </a:rPr>
+              <a:t>curit</a:t>
+            </a:r>
+            <a:r>
+              <a:rPr lang="fr-FR" sz="5400" dirty="0">
+                <a:solidFill>
+                  <a:srgbClr val="6E80A5"/>
+                </a:solidFill>
+              </a:rPr>
+              <a:t>é</a:t>
+            </a:r>
+            <a:r>
+              <a:rPr lang="en-US" sz="5400" i="0" dirty="0">
+                <a:solidFill>
+                  <a:srgbClr val="6E80A5"/>
+                </a:solidFill>
+                <a:effectLst/>
+              </a:rPr>
+              <a:t> des </a:t>
             </a:r>
             <a:r>
               <a:rPr lang="en-US" sz="5400" dirty="0">
@@ -3162,7 +3481,24 @@
                 </a:solidFill>
                 <a:effectLst/>
               </a:rPr>
-              <a:t>onnées</a:t>
+              <a:t>onn</a:t>
+            </a:r>
+            <a:r>
+              <a:rPr lang="fr-FR" sz="5400" dirty="0">
+                <a:solidFill>
+                  <a:srgbClr val="6E80A5"/>
+                </a:solidFill>
+              </a:rPr>
+              <a:t>é</a:t>
+            </a:r>
+            <a:r>
+              <a:rPr lang="en-US" sz="5400" i="0" dirty="0">
+                <a:solidFill>
+                  <a:srgbClr val="6E80A5"/>
+                </a:solidFill>
+                <a:effectLst/>
+              </a:rPr>
+              <a:t>es</a:t>
             </a:r>
           </a:p>
         </p:txBody>
@@ -3172,7 +3508,7 @@
           <p:cNvPr id="4" name="Picture 3">
             <a:extLst>
               <a:ext uri="{FF2B5EF4-FFF2-40B4-BE49-F238E27FC236}">
-                <a16:creationId xmlns:a16="http://schemas.microsoft.com/office/drawing/2014/main" id="{CCE796D2-597E-49B2-B466-30E064CEECB2}"/>
+                <a16:creationId xmlns:a16="http://schemas.microsoft.com/office/drawing/2014/main" id="{C4198DC7-9A71-4C38-AF71-4F8BF616FC6D}"/>
               </a:ext>
             </a:extLst>
           </p:cNvPr>
@@ -3189,8 +3525,8 @@
         </p:blipFill>
         <p:spPr>
           <a:xfrm>
-            <a:off x="1489122" y="1663444"/>
-            <a:ext cx="3943490" cy="3943490"/>
+            <a:off x="7238139" y="6190283"/>
+            <a:ext cx="3673286" cy="466790"/>
           </a:xfrm>
           <a:prstGeom prst="rect">
             <a:avLst/>
@@ -3199,10 +3535,10 @@
       </p:pic>
       <p:sp>
         <p:nvSpPr>
-          <p:cNvPr id="6" name="TextBox 5">
-            <a:extLst>
-              <a:ext uri="{FF2B5EF4-FFF2-40B4-BE49-F238E27FC236}">
-                <a16:creationId xmlns:a16="http://schemas.microsoft.com/office/drawing/2014/main" id="{657BA596-5A39-42BF-90BD-5FE090354CB6}"/>
+          <p:cNvPr id="3" name="TextBox 2">
+            <a:extLst>
+              <a:ext uri="{FF2B5EF4-FFF2-40B4-BE49-F238E27FC236}">
+                <a16:creationId xmlns:a16="http://schemas.microsoft.com/office/drawing/2014/main" id="{9EEA3A75-4604-458E-B486-1E5EE8E41D3D}"/>
               </a:ext>
             </a:extLst>
           </p:cNvPr>
@@ -3211,8 +3547,162 @@
         </p:nvSpPr>
         <p:spPr>
           <a:xfrm>
-            <a:off x="5755339" y="1999131"/>
-            <a:ext cx="4365813" cy="2677656"/>
+            <a:off x="7861982" y="6283667"/>
+            <a:ext cx="3153398" cy="400110"/>
+          </a:xfrm>
+          <a:prstGeom prst="rect">
+            <a:avLst/>
+          </a:prstGeom>
+          <a:noFill/>
+        </p:spPr>
+        <p:txBody>
+          <a:bodyPr wrap="square" rtlCol="0">
+            <a:spAutoFit/>
+          </a:bodyPr>
+          <a:lstStyle/>
+          <a:p>
+            <a:r>
+              <a:rPr lang="fr-FR" sz="2000" dirty="0">
+                <a:solidFill>
+                  <a:srgbClr val="002060"/>
+                </a:solidFill>
+              </a:rPr>
+              <a:t>E4 - Filière Informatique -2</a:t>
+            </a:r>
+            <a:endParaRPr lang="en-US" sz="2000" dirty="0">
+              <a:solidFill>
+                <a:srgbClr val="002060"/>
+              </a:solidFill>
+            </a:endParaRPr>
+          </a:p>
+        </p:txBody>
+      </p:sp>
+      <p:pic>
+        <p:nvPicPr>
+          <p:cNvPr id="6" name="Graphic 5">
+            <a:extLst>
+              <a:ext uri="{FF2B5EF4-FFF2-40B4-BE49-F238E27FC236}">
+                <a16:creationId xmlns:a16="http://schemas.microsoft.com/office/drawing/2014/main" id="{8749F0AB-3920-4E05-8A0C-01494C716E75}"/>
+              </a:ext>
+            </a:extLst>
+          </p:cNvPr>
+          <p:cNvPicPr>
+            <a:picLocks noChangeAspect="1"/>
+          </p:cNvPicPr>
+          <p:nvPr/>
+        </p:nvPicPr>
+        <p:blipFill>
+          <a:blip r:embed="rId3">
+            <a:extLst>
+              <a:ext uri="{96DAC541-7B7A-43D3-8B79-37D633B846F1}">
+                <asvg:svgBlip xmlns:asvg="http://schemas.microsoft.com/office/drawing/2016/SVG/main" r:embed="rId4"/>
+              </a:ext>
+            </a:extLst>
+          </a:blip>
+          <a:stretch>
+            <a:fillRect/>
+          </a:stretch>
+        </p:blipFill>
+        <p:spPr>
+          <a:xfrm>
+            <a:off x="1195629" y="1763302"/>
+            <a:ext cx="5854652" cy="3331395"/>
+          </a:xfrm>
+          <a:prstGeom prst="rect">
+            <a:avLst/>
+          </a:prstGeom>
+        </p:spPr>
+      </p:pic>
+      <p:pic>
+        <p:nvPicPr>
+          <p:cNvPr id="8" name="Picture 7">
+            <a:extLst>
+              <a:ext uri="{FF2B5EF4-FFF2-40B4-BE49-F238E27FC236}">
+                <a16:creationId xmlns:a16="http://schemas.microsoft.com/office/drawing/2014/main" id="{17E122D0-0ECD-4B94-9ED1-F04E2DC59FAB}"/>
+              </a:ext>
+            </a:extLst>
+          </p:cNvPr>
+          <p:cNvPicPr>
+            <a:picLocks noChangeAspect="1"/>
+          </p:cNvPicPr>
+          <p:nvPr/>
+        </p:nvPicPr>
+        <p:blipFill>
+          <a:blip r:embed="rId5"/>
+          <a:stretch>
+            <a:fillRect/>
+          </a:stretch>
+        </p:blipFill>
+        <p:spPr>
+          <a:xfrm>
+            <a:off x="7581306" y="6283667"/>
+            <a:ext cx="3714750" cy="428625"/>
+          </a:xfrm>
+          <a:prstGeom prst="rect">
+            <a:avLst/>
+          </a:prstGeom>
+        </p:spPr>
+      </p:pic>
+      <p:sp>
+        <p:nvSpPr>
+          <p:cNvPr id="7" name="TextBox 6">
+            <a:extLst>
+              <a:ext uri="{FF2B5EF4-FFF2-40B4-BE49-F238E27FC236}">
+                <a16:creationId xmlns:a16="http://schemas.microsoft.com/office/drawing/2014/main" id="{1B2F5423-36A1-4098-9171-476EAD2076A2}"/>
+              </a:ext>
+            </a:extLst>
+          </p:cNvPr>
+          <p:cNvSpPr txBox="1"/>
+          <p:nvPr/>
+        </p:nvSpPr>
+        <p:spPr>
+          <a:xfrm>
+            <a:off x="9125908" y="6423678"/>
+            <a:ext cx="3153398" cy="400110"/>
+          </a:xfrm>
+          <a:prstGeom prst="rect">
+            <a:avLst/>
+          </a:prstGeom>
+          <a:noFill/>
+        </p:spPr>
+        <p:txBody>
+          <a:bodyPr wrap="square" rtlCol="0">
+            <a:spAutoFit/>
+          </a:bodyPr>
+          <a:lstStyle/>
+          <a:p>
+            <a:r>
+              <a:rPr lang="fr-FR" sz="2000" dirty="0">
+                <a:solidFill>
+                  <a:srgbClr val="002060"/>
+                </a:solidFill>
+              </a:rPr>
+              <a:t>E4 - Filière Informatique - 5</a:t>
+            </a:r>
+            <a:endParaRPr lang="en-US" sz="2000" dirty="0">
+              <a:solidFill>
+                <a:srgbClr val="002060"/>
+              </a:solidFill>
+            </a:endParaRPr>
+          </a:p>
+        </p:txBody>
+      </p:sp>
+      <p:sp>
+        <p:nvSpPr>
+          <p:cNvPr id="2" name="TextBox 1">
+            <a:extLst>
+              <a:ext uri="{FF2B5EF4-FFF2-40B4-BE49-F238E27FC236}">
+                <a16:creationId xmlns:a16="http://schemas.microsoft.com/office/drawing/2014/main" id="{2719451E-DA5B-FB09-D55D-2B5FC0EA1FD7}"/>
+              </a:ext>
+            </a:extLst>
+          </p:cNvPr>
+          <p:cNvSpPr txBox="1"/>
+          <p:nvPr/>
+        </p:nvSpPr>
+        <p:spPr>
+          <a:xfrm>
+            <a:off x="7170316" y="2120424"/>
+            <a:ext cx="4365813" cy="3046988"/>
           </a:xfrm>
           <a:prstGeom prst="rect">
             <a:avLst/>
@@ -3230,8 +3720,16 @@
               <a:buChar char="•"/>
             </a:pPr>
             <a:r>
+              <a:rPr lang="en-US" sz="2400" dirty="0"/>
+              <a:t>Utilisation d’une API Key: </a:t>
+            </a:r>
+            <a:r>
               <a:rPr lang="fr-FR" sz="2400" dirty="0"/>
-              <a:t>Avoir un historique</a:t>
+              <a:t>Vérification de l’identité des utilisateurs (OAuth 2.0, API Key, JWT).</a:t>
+            </a:r>
+            <a:r>
+              <a:rPr lang="en-US" sz="2400" dirty="0"/>
+              <a:t> </a:t>
             </a:r>
           </a:p>
           <a:p>
@@ -3243,89 +3741,20 @@
               <a:buChar char="•"/>
             </a:pPr>
             <a:r>
+              <a:rPr lang="en-US" sz="2400" dirty="0"/>
+              <a:t>gestion des accès: </a:t>
+            </a:r>
+            <a:r>
               <a:rPr lang="fr-FR" sz="2400" dirty="0"/>
-              <a:t>Table pour stocker les actions utilisateurs</a:t>
-            </a:r>
-          </a:p>
-          <a:p>
-            <a:endParaRPr lang="fr-FR" sz="2400" dirty="0"/>
-          </a:p>
-          <a:p>
-            <a:pPr marL="285750" indent="-285750">
-              <a:buFont typeface="Arial" panose="020B0604020202020204" pitchFamily="34" charset="0"/>
-              <a:buChar char="•"/>
-            </a:pPr>
-            <a:r>
-              <a:rPr lang="fr-FR" sz="2400" dirty="0"/>
-              <a:t>Toutes les requêtes api ont une traçabilité</a:t>
+              <a:t>Définition des permissions pour chaque utilisateur.</a:t>
             </a:r>
           </a:p>
         </p:txBody>
       </p:sp>
-      <p:pic>
-        <p:nvPicPr>
-          <p:cNvPr id="5" name="Picture 4">
-            <a:extLst>
-              <a:ext uri="{FF2B5EF4-FFF2-40B4-BE49-F238E27FC236}">
-                <a16:creationId xmlns:a16="http://schemas.microsoft.com/office/drawing/2014/main" id="{6D38166A-20DE-4701-8478-E9C5408291DA}"/>
-              </a:ext>
-            </a:extLst>
-          </p:cNvPr>
-          <p:cNvPicPr>
-            <a:picLocks noChangeAspect="1"/>
-          </p:cNvPicPr>
-          <p:nvPr/>
-        </p:nvPicPr>
-        <p:blipFill>
-          <a:blip r:embed="rId3"/>
-          <a:stretch>
-            <a:fillRect/>
-          </a:stretch>
-        </p:blipFill>
-        <p:spPr>
-          <a:xfrm>
-            <a:off x="7368996" y="6263698"/>
-            <a:ext cx="3714750" cy="428625"/>
-          </a:xfrm>
-          <a:prstGeom prst="rect">
-            <a:avLst/>
-          </a:prstGeom>
-        </p:spPr>
-      </p:pic>
-      <p:pic>
-        <p:nvPicPr>
-          <p:cNvPr id="8" name="Picture 7">
-            <a:extLst>
-              <a:ext uri="{FF2B5EF4-FFF2-40B4-BE49-F238E27FC236}">
-                <a16:creationId xmlns:a16="http://schemas.microsoft.com/office/drawing/2014/main" id="{A34B9596-BD08-438C-8774-F9E7A70BAD66}"/>
-              </a:ext>
-            </a:extLst>
-          </p:cNvPr>
-          <p:cNvPicPr>
-            <a:picLocks noChangeAspect="1"/>
-          </p:cNvPicPr>
-          <p:nvPr/>
-        </p:nvPicPr>
-        <p:blipFill>
-          <a:blip r:embed="rId4"/>
-          <a:stretch>
-            <a:fillRect/>
-          </a:stretch>
-        </p:blipFill>
-        <p:spPr>
-          <a:xfrm>
-            <a:off x="8138831" y="6206547"/>
-            <a:ext cx="3219450" cy="542925"/>
-          </a:xfrm>
-          <a:prstGeom prst="rect">
-            <a:avLst/>
-          </a:prstGeom>
-        </p:spPr>
-      </p:pic>
     </p:spTree>
     <p:extLst>
       <p:ext uri="{BB962C8B-B14F-4D97-AF65-F5344CB8AC3E}">
-        <p14:creationId xmlns:p14="http://schemas.microsoft.com/office/powerpoint/2010/main" val="3665457014"/>
+        <p14:creationId xmlns:p14="http://schemas.microsoft.com/office/powerpoint/2010/main" val="97206983"/>
       </p:ext>
     </p:extLst>
   </p:cSld>
@@ -3357,7 +3786,7 @@
           <p:cNvPr id="2" name="TextBox 1">
             <a:extLst>
               <a:ext uri="{FF2B5EF4-FFF2-40B4-BE49-F238E27FC236}">
-                <a16:creationId xmlns:a16="http://schemas.microsoft.com/office/drawing/2014/main" id="{1771E757-F7BB-46C1-8987-6D321823E939}"/>
+                <a16:creationId xmlns:a16="http://schemas.microsoft.com/office/drawing/2014/main" id="{A433333F-B7A6-064A-7DE0-83BF06D0DD42}"/>
               </a:ext>
             </a:extLst>
           </p:cNvPr>
@@ -3381,29 +3810,40 @@
           <a:lstStyle/>
           <a:p>
             <a:r>
-              <a:rPr lang="fr-FR" sz="5400" i="0" dirty="0">
+              <a:rPr lang="en-US" sz="5400" i="0" dirty="0">
                 <a:solidFill>
                   <a:srgbClr val="6E80A5"/>
                 </a:solidFill>
                 <a:effectLst/>
               </a:rPr>
-              <a:t>Lien académique</a:t>
-            </a:r>
-            <a:endParaRPr lang="en-US" sz="5400" i="0" dirty="0">
-              <a:solidFill>
-                <a:srgbClr val="6E80A5"/>
-              </a:solidFill>
-              <a:effectLst/>
-            </a:endParaRPr>
+              <a:t>Tracabilité des </a:t>
+            </a:r>
+            <a:r>
+              <a:rPr lang="en-US" sz="5400" dirty="0">
+                <a:solidFill>
+                  <a:srgbClr val="6E80A5"/>
+                </a:solidFill>
+              </a:rPr>
+              <a:t>d</a:t>
+            </a:r>
+            <a:r>
+              <a:rPr lang="en-US" sz="5400" i="0" dirty="0">
+                <a:solidFill>
+                  <a:srgbClr val="6E80A5"/>
+                </a:solidFill>
+                <a:effectLst/>
+              </a:rPr>
+              <a:t>onnées</a:t>
+            </a:r>
           </a:p>
         </p:txBody>
       </p:sp>
       <p:pic>
         <p:nvPicPr>
-          <p:cNvPr id="6" name="Picture 5">
-            <a:extLst>
-              <a:ext uri="{FF2B5EF4-FFF2-40B4-BE49-F238E27FC236}">
-                <a16:creationId xmlns:a16="http://schemas.microsoft.com/office/drawing/2014/main" id="{04DC125B-E637-45D9-ACFD-99627204DFAF}"/>
+          <p:cNvPr id="4" name="Picture 3">
+            <a:extLst>
+              <a:ext uri="{FF2B5EF4-FFF2-40B4-BE49-F238E27FC236}">
+                <a16:creationId xmlns:a16="http://schemas.microsoft.com/office/drawing/2014/main" id="{CCE796D2-597E-49B2-B466-30E064CEECB2}"/>
               </a:ext>
             </a:extLst>
           </p:cNvPr>
@@ -3420,8 +3860,8 @@
         </p:blipFill>
         <p:spPr>
           <a:xfrm>
-            <a:off x="1766041" y="1736909"/>
-            <a:ext cx="3384181" cy="3384181"/>
+            <a:off x="1489122" y="1663444"/>
+            <a:ext cx="3943490" cy="3943490"/>
           </a:xfrm>
           <a:prstGeom prst="rect">
             <a:avLst/>
@@ -3430,10 +3870,10 @@
       </p:pic>
       <p:sp>
         <p:nvSpPr>
-          <p:cNvPr id="7" name="TextBox 6">
-            <a:extLst>
-              <a:ext uri="{FF2B5EF4-FFF2-40B4-BE49-F238E27FC236}">
-                <a16:creationId xmlns:a16="http://schemas.microsoft.com/office/drawing/2014/main" id="{9664D340-FF7E-4931-B70E-4CC55B21DE33}"/>
+          <p:cNvPr id="6" name="TextBox 5">
+            <a:extLst>
+              <a:ext uri="{FF2B5EF4-FFF2-40B4-BE49-F238E27FC236}">
+                <a16:creationId xmlns:a16="http://schemas.microsoft.com/office/drawing/2014/main" id="{657BA596-5A39-42BF-90BD-5FE090354CB6}"/>
               </a:ext>
             </a:extLst>
           </p:cNvPr>
@@ -3442,8 +3882,8 @@
         </p:nvSpPr>
         <p:spPr>
           <a:xfrm>
-            <a:off x="5706624" y="2767279"/>
-            <a:ext cx="3575778" cy="1323439"/>
+            <a:off x="5755339" y="1999131"/>
+            <a:ext cx="4365813" cy="2677656"/>
           </a:xfrm>
           <a:prstGeom prst="rect">
             <a:avLst/>
@@ -3456,10 +3896,108 @@
           </a:bodyPr>
           <a:lstStyle/>
           <a:p>
-            <a:pPr algn="ctr"/>
-            <a:r>
-              <a:rPr lang="fr-FR" sz="4000" dirty="0"/>
-              <a:t>Développement web</a:t>
+            <a:pPr marL="285750" indent="-285750">
+              <a:buFont typeface="Arial" panose="020B0604020202020204" pitchFamily="34" charset="0"/>
+              <a:buChar char="•"/>
+            </a:pPr>
+            <a:r>
+              <a:rPr lang="fr-FR" sz="2400" dirty="0"/>
+              <a:t>Avoir un historique des actions</a:t>
+            </a:r>
+          </a:p>
+          <a:p>
+            <a:endParaRPr lang="fr-FR" sz="2400" dirty="0"/>
+          </a:p>
+          <a:p>
+            <a:pPr marL="285750" indent="-285750">
+              <a:buFont typeface="Arial" panose="020B0604020202020204" pitchFamily="34" charset="0"/>
+              <a:buChar char="•"/>
+            </a:pPr>
+            <a:r>
+              <a:rPr lang="fr-FR" sz="2400" dirty="0"/>
+              <a:t>Table pour stocker les actions utilisateurs</a:t>
+            </a:r>
+          </a:p>
+          <a:p>
+            <a:endParaRPr lang="fr-FR" sz="2400" dirty="0"/>
+          </a:p>
+          <a:p>
+            <a:pPr marL="285750" indent="-285750">
+              <a:buFont typeface="Arial" panose="020B0604020202020204" pitchFamily="34" charset="0"/>
+              <a:buChar char="•"/>
+            </a:pPr>
+            <a:r>
+              <a:rPr lang="fr-FR" sz="2400" dirty="0"/>
+              <a:t>Toutes requêtes api ont une traçabilité</a:t>
+            </a:r>
+          </a:p>
+        </p:txBody>
+      </p:sp>
+      <p:pic>
+        <p:nvPicPr>
+          <p:cNvPr id="5" name="Picture 4">
+            <a:extLst>
+              <a:ext uri="{FF2B5EF4-FFF2-40B4-BE49-F238E27FC236}">
+                <a16:creationId xmlns:a16="http://schemas.microsoft.com/office/drawing/2014/main" id="{6D38166A-20DE-4701-8478-E9C5408291DA}"/>
+              </a:ext>
+            </a:extLst>
+          </p:cNvPr>
+          <p:cNvPicPr>
+            <a:picLocks noChangeAspect="1"/>
+          </p:cNvPicPr>
+          <p:nvPr/>
+        </p:nvPicPr>
+        <p:blipFill>
+          <a:blip r:embed="rId3"/>
+          <a:stretch>
+            <a:fillRect/>
+          </a:stretch>
+        </p:blipFill>
+        <p:spPr>
+          <a:xfrm>
+            <a:off x="7368996" y="6263698"/>
+            <a:ext cx="3714750" cy="428625"/>
+          </a:xfrm>
+          <a:prstGeom prst="rect">
+            <a:avLst/>
+          </a:prstGeom>
+        </p:spPr>
+      </p:pic>
+      <p:sp>
+        <p:nvSpPr>
+          <p:cNvPr id="3" name="TextBox 2">
+            <a:extLst>
+              <a:ext uri="{FF2B5EF4-FFF2-40B4-BE49-F238E27FC236}">
+                <a16:creationId xmlns:a16="http://schemas.microsoft.com/office/drawing/2014/main" id="{146A82B8-8B6C-9540-B70C-13D7ADCB3FA4}"/>
+              </a:ext>
+            </a:extLst>
+          </p:cNvPr>
+          <p:cNvSpPr txBox="1"/>
+          <p:nvPr/>
+        </p:nvSpPr>
+        <p:spPr>
+          <a:xfrm>
+            <a:off x="9108333" y="6457890"/>
+            <a:ext cx="3153398" cy="400110"/>
+          </a:xfrm>
+          <a:prstGeom prst="rect">
+            <a:avLst/>
+          </a:prstGeom>
+          <a:noFill/>
+        </p:spPr>
+        <p:txBody>
+          <a:bodyPr wrap="square" rtlCol="0">
+            <a:spAutoFit/>
+          </a:bodyPr>
+          <a:lstStyle/>
+          <a:p>
+            <a:r>
+              <a:rPr lang="fr-FR" sz="2000" dirty="0">
+                <a:solidFill>
+                  <a:srgbClr val="002060"/>
+                </a:solidFill>
+              </a:rPr>
+              <a:t>E4 - Filière Informatique - 6</a:t>
             </a:r>
           </a:p>
         </p:txBody>
@@ -3467,7 +4005,7 @@
     </p:spTree>
     <p:extLst>
       <p:ext uri="{BB962C8B-B14F-4D97-AF65-F5344CB8AC3E}">
-        <p14:creationId xmlns:p14="http://schemas.microsoft.com/office/powerpoint/2010/main" val="4187498392"/>
+        <p14:creationId xmlns:p14="http://schemas.microsoft.com/office/powerpoint/2010/main" val="3665457014"/>
       </p:ext>
     </p:extLst>
   </p:cSld>
@@ -3499,7 +4037,7 @@
           <p:cNvPr id="2" name="TextBox 1">
             <a:extLst>
               <a:ext uri="{FF2B5EF4-FFF2-40B4-BE49-F238E27FC236}">
-                <a16:creationId xmlns:a16="http://schemas.microsoft.com/office/drawing/2014/main" id="{E00B64CD-753B-4BF5-B4C1-B055AA0A54FB}"/>
+                <a16:creationId xmlns:a16="http://schemas.microsoft.com/office/drawing/2014/main" id="{1771E757-F7BB-46C1-8987-6D321823E939}"/>
               </a:ext>
             </a:extLst>
           </p:cNvPr>
@@ -3508,7 +4046,7 @@
         </p:nvSpPr>
         <p:spPr>
           <a:xfrm>
-            <a:off x="3953456" y="75611"/>
+            <a:off x="3905280" y="165677"/>
             <a:ext cx="7178466" cy="923330"/>
           </a:xfrm>
           <a:prstGeom prst="rect">
@@ -3523,27 +4061,29 @@
           <a:lstStyle/>
           <a:p>
             <a:r>
-              <a:rPr lang="fr-FR" sz="5400" dirty="0">
+              <a:rPr lang="fr-FR" sz="5400" i="0" dirty="0">
                 <a:solidFill>
                   <a:srgbClr val="6E80A5"/>
                 </a:solidFill>
+                <a:effectLst/>
               </a:rPr>
-              <a:t>Conclusion</a:t>
-            </a:r>
-            <a:endParaRPr lang="en-US" sz="5400" dirty="0">
+              <a:t>Lien académique</a:t>
+            </a:r>
+            <a:endParaRPr lang="en-US" sz="5400" i="0" dirty="0">
               <a:solidFill>
                 <a:srgbClr val="6E80A5"/>
               </a:solidFill>
+              <a:effectLst/>
             </a:endParaRPr>
           </a:p>
         </p:txBody>
       </p:sp>
       <p:pic>
         <p:nvPicPr>
-          <p:cNvPr id="4" name="Picture 3">
-            <a:extLst>
-              <a:ext uri="{FF2B5EF4-FFF2-40B4-BE49-F238E27FC236}">
-                <a16:creationId xmlns:a16="http://schemas.microsoft.com/office/drawing/2014/main" id="{DF8A8325-E6A8-441C-83D4-6224D79235B4}"/>
+          <p:cNvPr id="5" name="Picture 4">
+            <a:extLst>
+              <a:ext uri="{FF2B5EF4-FFF2-40B4-BE49-F238E27FC236}">
+                <a16:creationId xmlns:a16="http://schemas.microsoft.com/office/drawing/2014/main" id="{8DFE593B-911B-9032-F06C-76EA1939DEEC}"/>
               </a:ext>
             </a:extLst>
           </p:cNvPr>
@@ -3560,20 +4100,102 @@
         </p:blipFill>
         <p:spPr>
           <a:xfrm>
-            <a:off x="7417172" y="6280617"/>
-            <a:ext cx="3714750" cy="428625"/>
+            <a:off x="7352397" y="6076162"/>
+            <a:ext cx="3702918" cy="717397"/>
           </a:xfrm>
           <a:prstGeom prst="rect">
             <a:avLst/>
           </a:prstGeom>
         </p:spPr>
       </p:pic>
+      <p:sp>
+        <p:nvSpPr>
+          <p:cNvPr id="4" name="TextBox 3">
+            <a:extLst>
+              <a:ext uri="{FF2B5EF4-FFF2-40B4-BE49-F238E27FC236}">
+                <a16:creationId xmlns:a16="http://schemas.microsoft.com/office/drawing/2014/main" id="{E79F2135-2159-0D74-E4B6-AD9358BF9AAF}"/>
+              </a:ext>
+            </a:extLst>
+          </p:cNvPr>
+          <p:cNvSpPr txBox="1"/>
+          <p:nvPr/>
+        </p:nvSpPr>
+        <p:spPr>
+          <a:xfrm>
+            <a:off x="1186985" y="1952490"/>
+            <a:ext cx="4365813" cy="830997"/>
+          </a:xfrm>
+          <a:prstGeom prst="rect">
+            <a:avLst/>
+          </a:prstGeom>
+          <a:noFill/>
+        </p:spPr>
+        <p:txBody>
+          <a:bodyPr wrap="square">
+            <a:spAutoFit/>
+          </a:bodyPr>
+          <a:lstStyle/>
+          <a:p>
+            <a:pPr marL="285750" indent="-285750">
+              <a:buFont typeface="Arial" panose="020B0604020202020204" pitchFamily="34" charset="0"/>
+              <a:buChar char="•"/>
+            </a:pPr>
+            <a:r>
+              <a:rPr lang="en-US" sz="2400" dirty="0"/>
+              <a:t>Requêtes Fetch</a:t>
+            </a:r>
+            <a:br>
+              <a:rPr lang="en-US" sz="2400" dirty="0"/>
+            </a:br>
+            <a:endParaRPr lang="fr-FR" sz="2400" dirty="0"/>
+          </a:p>
+        </p:txBody>
+      </p:sp>
+      <p:sp>
+        <p:nvSpPr>
+          <p:cNvPr id="9" name="TextBox 8">
+            <a:extLst>
+              <a:ext uri="{FF2B5EF4-FFF2-40B4-BE49-F238E27FC236}">
+                <a16:creationId xmlns:a16="http://schemas.microsoft.com/office/drawing/2014/main" id="{6E21307C-5CB5-D428-7E4F-70FAE02715E3}"/>
+              </a:ext>
+            </a:extLst>
+          </p:cNvPr>
+          <p:cNvSpPr txBox="1"/>
+          <p:nvPr/>
+        </p:nvSpPr>
+        <p:spPr>
+          <a:xfrm>
+            <a:off x="9099787" y="6434860"/>
+            <a:ext cx="3153398" cy="400110"/>
+          </a:xfrm>
+          <a:prstGeom prst="rect">
+            <a:avLst/>
+          </a:prstGeom>
+          <a:noFill/>
+        </p:spPr>
+        <p:txBody>
+          <a:bodyPr wrap="square" rtlCol="0">
+            <a:spAutoFit/>
+          </a:bodyPr>
+          <a:lstStyle/>
+          <a:p>
+            <a:r>
+              <a:rPr lang="fr-FR" sz="2000" dirty="0">
+                <a:solidFill>
+                  <a:srgbClr val="002060"/>
+                </a:solidFill>
+              </a:rPr>
+              <a:t>E4 - Filière Informatique - 7</a:t>
+            </a:r>
+          </a:p>
+        </p:txBody>
+      </p:sp>
       <p:pic>
         <p:nvPicPr>
-          <p:cNvPr id="6" name="Picture 5">
-            <a:extLst>
-              <a:ext uri="{FF2B5EF4-FFF2-40B4-BE49-F238E27FC236}">
-                <a16:creationId xmlns:a16="http://schemas.microsoft.com/office/drawing/2014/main" id="{30A0B9AE-FA2C-47BD-B65A-C29F578D35FC}"/>
+          <p:cNvPr id="14" name="Picture 13">
+            <a:extLst>
+              <a:ext uri="{FF2B5EF4-FFF2-40B4-BE49-F238E27FC236}">
+                <a16:creationId xmlns:a16="http://schemas.microsoft.com/office/drawing/2014/main" id="{49345F48-5618-552F-948B-2B6CD8F4181E}"/>
               </a:ext>
             </a:extLst>
           </p:cNvPr>
@@ -3590,98 +4212,8 @@
         </p:blipFill>
         <p:spPr>
           <a:xfrm>
-            <a:off x="8000439" y="6166317"/>
-            <a:ext cx="3219450" cy="542925"/>
-          </a:xfrm>
-          <a:prstGeom prst="rect">
-            <a:avLst/>
-          </a:prstGeom>
-        </p:spPr>
-      </p:pic>
-      <p:pic>
-        <p:nvPicPr>
-          <p:cNvPr id="10" name="Picture 9">
-            <a:extLst>
-              <a:ext uri="{FF2B5EF4-FFF2-40B4-BE49-F238E27FC236}">
-                <a16:creationId xmlns:a16="http://schemas.microsoft.com/office/drawing/2014/main" id="{43A5C624-EB3E-4190-9805-EEC5E50479C2}"/>
-              </a:ext>
-            </a:extLst>
-          </p:cNvPr>
-          <p:cNvPicPr>
-            <a:picLocks noChangeAspect="1"/>
-          </p:cNvPicPr>
-          <p:nvPr/>
-        </p:nvPicPr>
-        <p:blipFill>
-          <a:blip r:embed="rId2"/>
-          <a:stretch>
-            <a:fillRect/>
-          </a:stretch>
-        </p:blipFill>
-        <p:spPr>
-          <a:xfrm>
-            <a:off x="7259731" y="6280616"/>
-            <a:ext cx="3714750" cy="428625"/>
-          </a:xfrm>
-          <a:prstGeom prst="rect">
-            <a:avLst/>
-          </a:prstGeom>
-        </p:spPr>
-      </p:pic>
-      <p:pic>
-        <p:nvPicPr>
-          <p:cNvPr id="12" name="Picture 11">
-            <a:extLst>
-              <a:ext uri="{FF2B5EF4-FFF2-40B4-BE49-F238E27FC236}">
-                <a16:creationId xmlns:a16="http://schemas.microsoft.com/office/drawing/2014/main" id="{845B8B9C-835D-483C-AC33-DC847E6916CC}"/>
-              </a:ext>
-            </a:extLst>
-          </p:cNvPr>
-          <p:cNvPicPr>
-            <a:picLocks noChangeAspect="1"/>
-          </p:cNvPicPr>
-          <p:nvPr/>
-        </p:nvPicPr>
-        <p:blipFill>
-          <a:blip r:embed="rId3"/>
-          <a:stretch>
-            <a:fillRect/>
-          </a:stretch>
-        </p:blipFill>
-        <p:spPr>
-          <a:xfrm>
-            <a:off x="8260417" y="6223465"/>
-            <a:ext cx="3219450" cy="542925"/>
-          </a:xfrm>
-          <a:prstGeom prst="rect">
-            <a:avLst/>
-          </a:prstGeom>
-        </p:spPr>
-      </p:pic>
-      <p:pic>
-        <p:nvPicPr>
-          <p:cNvPr id="24" name="Picture 23">
-            <a:extLst>
-              <a:ext uri="{FF2B5EF4-FFF2-40B4-BE49-F238E27FC236}">
-                <a16:creationId xmlns:a16="http://schemas.microsoft.com/office/drawing/2014/main" id="{7B20C7CD-F17D-421A-AF41-E42ED8DE0927}"/>
-              </a:ext>
-            </a:extLst>
-          </p:cNvPr>
-          <p:cNvPicPr>
-            <a:picLocks noChangeAspect="1"/>
-          </p:cNvPicPr>
-          <p:nvPr/>
-        </p:nvPicPr>
-        <p:blipFill>
-          <a:blip r:embed="rId4"/>
-          <a:stretch>
-            <a:fillRect/>
-          </a:stretch>
-        </p:blipFill>
-        <p:spPr>
-          <a:xfrm>
-            <a:off x="3836214" y="1550771"/>
-            <a:ext cx="4424203" cy="4424203"/>
+            <a:off x="1186985" y="2554886"/>
+            <a:ext cx="10507541" cy="1838582"/>
           </a:xfrm>
           <a:prstGeom prst="rect">
             <a:avLst/>
@@ -3691,7 +4223,7 @@
     </p:spTree>
     <p:extLst>
       <p:ext uri="{BB962C8B-B14F-4D97-AF65-F5344CB8AC3E}">
-        <p14:creationId xmlns:p14="http://schemas.microsoft.com/office/powerpoint/2010/main" val="1783822029"/>
+        <p14:creationId xmlns:p14="http://schemas.microsoft.com/office/powerpoint/2010/main" val="4187498392"/>
       </p:ext>
     </p:extLst>
   </p:cSld>
